--- a/SPONSOR_CONTENT_REPORT.pptx
+++ b/SPONSOR_CONTENT_REPORT.pptx
@@ -3744,7 +3744,7 @@
                 </a:solidFill>
                 <a:latin typeface="Georgia"/>
               </a:rPr>
-              <a:t>8,058</a:t>
+              <a:t>8,060</a:t>
             </a:r>
           </a:p>
         </p:txBody>
@@ -8792,7 +8792,7 @@
                 </a:solidFill>
                 <a:latin typeface="Helvetica Neue"/>
               </a:rPr>
-              <a:t>1,394 avg views/post   ·   88 posts   ·   122,674 total</a:t>
+              <a:t>1,394 avg views/post   ·   88 posts   ·   122,682 total</a:t>
             </a:r>
           </a:p>
         </p:txBody>
@@ -10711,7 +10711,7 @@
                 </a:solidFill>
                 <a:latin typeface="Helvetica Neue"/>
               </a:rPr>
-              <a:t>71,031 views · 21 posts</a:t>
+              <a:t>71,035 views · 21 posts</a:t>
             </a:r>
           </a:p>
         </p:txBody>
@@ -10759,7 +10759,7 @@
         <p:spPr>
           <a:xfrm>
             <a:off x="4114800" y="2548682"/>
-            <a:ext cx="6092390" cy="143810"/>
+            <a:ext cx="6092047" cy="143810"/>
           </a:xfrm>
           <a:prstGeom prst="rect">
             <a:avLst/>
@@ -10802,7 +10802,7 @@
         </p:nvSpPr>
         <p:spPr>
           <a:xfrm>
-            <a:off x="10298630" y="2466386"/>
+            <a:off x="10298287" y="2466386"/>
             <a:ext cx="2286000" cy="344978"/>
           </a:xfrm>
           <a:prstGeom prst="rect">
@@ -10871,7 +10871,7 @@
         <p:spPr>
           <a:xfrm>
             <a:off x="4114800" y="2893660"/>
-            <a:ext cx="4054678" cy="143810"/>
+            <a:ext cx="4054537" cy="143810"/>
           </a:xfrm>
           <a:prstGeom prst="rect">
             <a:avLst/>
@@ -10914,7 +10914,7 @@
         </p:nvSpPr>
         <p:spPr>
           <a:xfrm>
-            <a:off x="8260918" y="2811364"/>
+            <a:off x="8260777" y="2811364"/>
             <a:ext cx="2286000" cy="344978"/>
           </a:xfrm>
           <a:prstGeom prst="rect">
@@ -10935,7 +10935,7 @@
                 </a:solidFill>
                 <a:latin typeface="Helvetica Neue"/>
               </a:rPr>
-              <a:t>46,319 views · 13 posts</a:t>
+              <a:t>46,320 views · 13 posts</a:t>
             </a:r>
           </a:p>
         </p:txBody>
@@ -10983,7 +10983,7 @@
         <p:spPr>
           <a:xfrm>
             <a:off x="4114800" y="3238638"/>
-            <a:ext cx="3330125" cy="143810"/>
+            <a:ext cx="3330900" cy="143810"/>
           </a:xfrm>
           <a:prstGeom prst="rect">
             <a:avLst/>
@@ -11026,7 +11026,7 @@
         </p:nvSpPr>
         <p:spPr>
           <a:xfrm>
-            <a:off x="7536365" y="3156342"/>
+            <a:off x="7537140" y="3156342"/>
             <a:ext cx="2286000" cy="344978"/>
           </a:xfrm>
           <a:prstGeom prst="rect">
@@ -11047,7 +11047,7 @@
                 </a:solidFill>
                 <a:latin typeface="Helvetica Neue"/>
               </a:rPr>
-              <a:t>38,042 views · 54 posts</a:t>
+              <a:t>38,053 views · 54 posts</a:t>
             </a:r>
           </a:p>
         </p:txBody>
@@ -11095,7 +11095,7 @@
         <p:spPr>
           <a:xfrm>
             <a:off x="4114800" y="3583616"/>
-            <a:ext cx="3239698" cy="143810"/>
+            <a:ext cx="3239690" cy="143810"/>
           </a:xfrm>
           <a:prstGeom prst="rect">
             <a:avLst/>
@@ -11138,7 +11138,7 @@
         </p:nvSpPr>
         <p:spPr>
           <a:xfrm>
-            <a:off x="7445938" y="3501320"/>
+            <a:off x="7445930" y="3501320"/>
             <a:ext cx="2286000" cy="344978"/>
           </a:xfrm>
           <a:prstGeom prst="rect">
@@ -11159,7 +11159,7 @@
                 </a:solidFill>
                 <a:latin typeface="Helvetica Neue"/>
               </a:rPr>
-              <a:t>37,009 views · 25 posts</a:t>
+              <a:t>37,011 views · 25 posts</a:t>
             </a:r>
           </a:p>
         </p:txBody>
@@ -11207,7 +11207,7 @@
         <p:spPr>
           <a:xfrm>
             <a:off x="4114800" y="3928594"/>
-            <a:ext cx="2274502" cy="143810"/>
+            <a:ext cx="2275162" cy="143810"/>
           </a:xfrm>
           <a:prstGeom prst="rect">
             <a:avLst/>
@@ -11250,7 +11250,7 @@
         </p:nvSpPr>
         <p:spPr>
           <a:xfrm>
-            <a:off x="6480742" y="3846298"/>
+            <a:off x="6481402" y="3846298"/>
             <a:ext cx="2286000" cy="344978"/>
           </a:xfrm>
           <a:prstGeom prst="rect">
@@ -11271,7 +11271,7 @@
                 </a:solidFill>
                 <a:latin typeface="Helvetica Neue"/>
               </a:rPr>
-              <a:t>25,983 views · 31 posts</a:t>
+              <a:t>25,992 views · 31 posts</a:t>
             </a:r>
           </a:p>
         </p:txBody>
@@ -11319,7 +11319,7 @@
         <p:spPr>
           <a:xfrm>
             <a:off x="4114800" y="4273573"/>
-            <a:ext cx="2090672" cy="143810"/>
+            <a:ext cx="2090817" cy="143810"/>
           </a:xfrm>
           <a:prstGeom prst="rect">
             <a:avLst/>
@@ -11362,7 +11362,7 @@
         </p:nvSpPr>
         <p:spPr>
           <a:xfrm>
-            <a:off x="6296912" y="4191277"/>
+            <a:off x="6297057" y="4191277"/>
             <a:ext cx="2286000" cy="344978"/>
           </a:xfrm>
           <a:prstGeom prst="rect">
@@ -11383,7 +11383,7 @@
                 </a:solidFill>
                 <a:latin typeface="Helvetica Neue"/>
               </a:rPr>
-              <a:t>23,883 views · 31 posts</a:t>
+              <a:t>23,886 views · 31 posts</a:t>
             </a:r>
           </a:p>
         </p:txBody>
@@ -11431,7 +11431,7 @@
         <p:spPr>
           <a:xfrm>
             <a:off x="4114800" y="4618551"/>
-            <a:ext cx="705382" cy="143810"/>
+            <a:ext cx="705517" cy="143810"/>
           </a:xfrm>
           <a:prstGeom prst="rect">
             <a:avLst/>
@@ -11474,7 +11474,7 @@
         </p:nvSpPr>
         <p:spPr>
           <a:xfrm>
-            <a:off x="4911622" y="4536255"/>
+            <a:off x="4911757" y="4536255"/>
             <a:ext cx="2286000" cy="344978"/>
           </a:xfrm>
           <a:prstGeom prst="rect">
@@ -11495,7 +11495,7 @@
                 </a:solidFill>
                 <a:latin typeface="Helvetica Neue"/>
               </a:rPr>
-              <a:t>8,058 views · 6 posts</a:t>
+              <a:t>8,060 views · 6 posts</a:t>
             </a:r>
           </a:p>
         </p:txBody>
@@ -11543,7 +11543,7 @@
         <p:spPr>
           <a:xfrm>
             <a:off x="4114800" y="4963529"/>
-            <a:ext cx="354004" cy="143810"/>
+            <a:ext cx="353984" cy="143810"/>
           </a:xfrm>
           <a:prstGeom prst="rect">
             <a:avLst/>
@@ -11586,7 +11586,7 @@
         </p:nvSpPr>
         <p:spPr>
           <a:xfrm>
-            <a:off x="4560244" y="4881233"/>
+            <a:off x="4560224" y="4881233"/>
             <a:ext cx="2286000" cy="344978"/>
           </a:xfrm>
           <a:prstGeom prst="rect">
@@ -11655,7 +11655,7 @@
         <p:spPr>
           <a:xfrm>
             <a:off x="4114800" y="5308507"/>
-            <a:ext cx="294215" cy="143810"/>
+            <a:ext cx="294199" cy="143810"/>
           </a:xfrm>
           <a:prstGeom prst="rect">
             <a:avLst/>
@@ -11698,7 +11698,7 @@
         </p:nvSpPr>
         <p:spPr>
           <a:xfrm>
-            <a:off x="4500455" y="5226211"/>
+            <a:off x="4500439" y="5226211"/>
             <a:ext cx="2286000" cy="344978"/>
           </a:xfrm>
           <a:prstGeom prst="rect">
@@ -11767,7 +11767,7 @@
         <p:spPr>
           <a:xfrm>
             <a:off x="4114800" y="5653485"/>
-            <a:ext cx="95416" cy="143810"/>
+            <a:ext cx="95411" cy="143810"/>
           </a:xfrm>
           <a:prstGeom prst="rect">
             <a:avLst/>
@@ -11810,7 +11810,7 @@
         </p:nvSpPr>
         <p:spPr>
           <a:xfrm>
-            <a:off x="4301656" y="5571189"/>
+            <a:off x="4301651" y="5571189"/>
             <a:ext cx="2286000" cy="344978"/>
           </a:xfrm>
           <a:prstGeom prst="rect">
@@ -12185,7 +12185,7 @@
                 </a:solidFill>
                 <a:latin typeface="Georgia"/>
               </a:rPr>
-              <a:t>71,031</a:t>
+              <a:t>71,035</a:t>
             </a:r>
           </a:p>
         </p:txBody>
@@ -12253,7 +12253,7 @@
                 </a:solidFill>
                 <a:latin typeface="Helvetica Neue"/>
               </a:rPr>
-              <a:t>3,382 average views per post</a:t>
+              <a:t>3,383 average views per post</a:t>
             </a:r>
           </a:p>
         </p:txBody>
@@ -14189,7 +14189,7 @@
                 </a:solidFill>
                 <a:latin typeface="Georgia"/>
               </a:rPr>
-              <a:t>46,319</a:t>
+              <a:t>46,320</a:t>
             </a:r>
           </a:p>
         </p:txBody>
@@ -15191,7 +15191,7 @@
                 </a:solidFill>
                 <a:latin typeface="Georgia"/>
               </a:rPr>
-              <a:t>38,042</a:t>
+              <a:t>38,053</a:t>
             </a:r>
           </a:p>
         </p:txBody>
@@ -15259,7 +15259,7 @@
                 </a:solidFill>
                 <a:latin typeface="Helvetica Neue"/>
               </a:rPr>
-              <a:t>704 average views per post</a:t>
+              <a:t>705 average views per post</a:t>
             </a:r>
           </a:p>
         </p:txBody>
@@ -15415,7 +15415,7 @@
                 </a:solidFill>
                 <a:latin typeface="Helvetica Neue"/>
               </a:rPr>
-              <a:t>#1  ·  IG  ·  5,136 views</a:t>
+              <a:t>#1  ·  IG  ·  5,142 views</a:t>
             </a:r>
           </a:p>
         </p:txBody>
@@ -16193,7 +16193,7 @@
                 </a:solidFill>
                 <a:latin typeface="Georgia"/>
               </a:rPr>
-              <a:t>37,009</a:t>
+              <a:t>37,011</a:t>
             </a:r>
           </a:p>
         </p:txBody>
@@ -17195,7 +17195,7 @@
                 </a:solidFill>
                 <a:latin typeface="Georgia"/>
               </a:rPr>
-              <a:t>25,983</a:t>
+              <a:t>25,992</a:t>
             </a:r>
           </a:p>
         </p:txBody>
@@ -18197,7 +18197,7 @@
                 </a:solidFill>
                 <a:latin typeface="Georgia"/>
               </a:rPr>
-              <a:t>23,883</a:t>
+              <a:t>23,886</a:t>
             </a:r>
           </a:p>
         </p:txBody>
@@ -18265,7 +18265,7 @@
                 </a:solidFill>
                 <a:latin typeface="Helvetica Neue"/>
               </a:rPr>
-              <a:t>770 average views per post</a:t>
+              <a:t>771 average views per post</a:t>
             </a:r>
           </a:p>
         </p:txBody>

--- a/SPONSOR_CONTENT_REPORT.pptx
+++ b/SPONSOR_CONTENT_REPORT.pptx
@@ -3322,7 +3322,7 @@
                 </a:solidFill>
                 <a:latin typeface="Helvetica Neue"/>
               </a:rPr>
-              <a:t>Reporting window: Jun 8 → 2026-07-17</a:t>
+              <a:t>Reporting window: Jun 8 → 2026-07-20</a:t>
             </a:r>
           </a:p>
         </p:txBody>
@@ -3744,7 +3744,7 @@
                 </a:solidFill>
                 <a:latin typeface="Georgia"/>
               </a:rPr>
-              <a:t>8,060</a:t>
+              <a:t>8,103</a:t>
             </a:r>
           </a:p>
         </p:txBody>
@@ -3778,7 +3778,7 @@
                 </a:solidFill>
                 <a:latin typeface="Helvetica Neue"/>
               </a:rPr>
-              <a:t>6 posts · 133 likes</a:t>
+              <a:t>6 posts · 134 likes</a:t>
             </a:r>
           </a:p>
         </p:txBody>
@@ -3812,7 +3812,7 @@
                 </a:solidFill>
                 <a:latin typeface="Helvetica Neue"/>
               </a:rPr>
-              <a:t>1,343 average views per post</a:t>
+              <a:t>1,350 average views per post</a:t>
             </a:r>
           </a:p>
         </p:txBody>
@@ -4280,7 +4280,7 @@
                 </a:solidFill>
                 <a:latin typeface="Helvetica Neue"/>
               </a:rPr>
-              <a:t>#3  ·  FB  ·  791 views</a:t>
+              <a:t>#3  ·  IG  ·  819 views</a:t>
             </a:r>
           </a:p>
         </p:txBody>
@@ -4314,7 +4314,7 @@
                 </a:solidFill>
                 <a:latin typeface="Helvetica Neue"/>
               </a:rPr>
-              <a:t>Running a restaurant means the show must go on, even when things are falling apart. Unlike</a:t>
+              <a:t>Running a restaurant means always wearing a smile, even when things are falling apart. You</a:t>
             </a:r>
           </a:p>
         </p:txBody>
@@ -5748,7 +5748,7 @@
                 </a:solidFill>
                 <a:latin typeface="Georgia"/>
               </a:rPr>
-              <a:t>3,361</a:t>
+              <a:t>3,367</a:t>
             </a:r>
           </a:p>
         </p:txBody>
@@ -5816,7 +5816,7 @@
                 </a:solidFill>
                 <a:latin typeface="Helvetica Neue"/>
               </a:rPr>
-              <a:t>560 average views per post</a:t>
+              <a:t>561 average views per post</a:t>
             </a:r>
           </a:p>
         </p:txBody>
@@ -6284,7 +6284,7 @@
                 </a:solidFill>
                 <a:latin typeface="Helvetica Neue"/>
               </a:rPr>
-              <a:t>#3  ·  IG  ·  660 views</a:t>
+              <a:t>#3  ·  IG  ·  664 views</a:t>
             </a:r>
           </a:p>
         </p:txBody>
@@ -6750,7 +6750,7 @@
                 </a:solidFill>
                 <a:latin typeface="Georgia"/>
               </a:rPr>
-              <a:t>1,090</a:t>
+              <a:t>1,093</a:t>
             </a:r>
           </a:p>
         </p:txBody>
@@ -6818,7 +6818,7 @@
                 </a:solidFill>
                 <a:latin typeface="Helvetica Neue"/>
               </a:rPr>
-              <a:t>545 average views per post</a:t>
+              <a:t>546 average views per post</a:t>
             </a:r>
           </a:p>
         </p:txBody>
@@ -6974,7 +6974,7 @@
                 </a:solidFill>
                 <a:latin typeface="Helvetica Neue"/>
               </a:rPr>
-              <a:t>#1  ·  FB  ·  696 views</a:t>
+              <a:t>#1  ·  FB  ·  697 views</a:t>
             </a:r>
           </a:p>
         </p:txBody>
@@ -7130,7 +7130,7 @@
                 </a:solidFill>
                 <a:latin typeface="Helvetica Neue"/>
               </a:rPr>
-              <a:t>#2  ·  TT  ·  394 views</a:t>
+              <a:t>#2  ·  TT  ·  396 views</a:t>
             </a:r>
           </a:p>
         </p:txBody>
@@ -8500,7 +8500,7 @@
                 </a:solidFill>
                 <a:latin typeface="Helvetica Neue"/>
               </a:rPr>
-              <a:t>2,578 avg views/post   ·   27 posts   ·   69,597 total</a:t>
+              <a:t>2,578 avg views/post   ·   27 posts   ·   69,600 total</a:t>
             </a:r>
           </a:p>
         </p:txBody>
@@ -8792,7 +8792,7 @@
                 </a:solidFill>
                 <a:latin typeface="Helvetica Neue"/>
               </a:rPr>
-              <a:t>1,394 avg views/post   ·   88 posts   ·   122,682 total</a:t>
+              <a:t>1,365 avg views/post   ·   90 posts   ·   122,852 total</a:t>
             </a:r>
           </a:p>
         </p:txBody>
@@ -10711,7 +10711,7 @@
                 </a:solidFill>
                 <a:latin typeface="Helvetica Neue"/>
               </a:rPr>
-              <a:t>71,035 views · 21 posts</a:t>
+              <a:t>71,386 views · 21 posts</a:t>
             </a:r>
           </a:p>
         </p:txBody>
@@ -10759,7 +10759,7 @@
         <p:spPr>
           <a:xfrm>
             <a:off x="4114800" y="2548682"/>
-            <a:ext cx="6092047" cy="143810"/>
+            <a:ext cx="6062354" cy="143810"/>
           </a:xfrm>
           <a:prstGeom prst="rect">
             <a:avLst/>
@@ -10802,7 +10802,7 @@
         </p:nvSpPr>
         <p:spPr>
           <a:xfrm>
-            <a:off x="10298287" y="2466386"/>
+            <a:off x="10268594" y="2466386"/>
             <a:ext cx="2286000" cy="344978"/>
           </a:xfrm>
           <a:prstGeom prst="rect">
@@ -10823,7 +10823,7 @@
                 </a:solidFill>
                 <a:latin typeface="Helvetica Neue"/>
               </a:rPr>
-              <a:t>69,597 views · 27 posts</a:t>
+              <a:t>69,600 views · 27 posts</a:t>
             </a:r>
           </a:p>
         </p:txBody>
@@ -10871,7 +10871,7 @@
         <p:spPr>
           <a:xfrm>
             <a:off x="4114800" y="2893660"/>
-            <a:ext cx="4054537" cy="143810"/>
+            <a:ext cx="4036691" cy="143810"/>
           </a:xfrm>
           <a:prstGeom prst="rect">
             <a:avLst/>
@@ -10914,7 +10914,7 @@
         </p:nvSpPr>
         <p:spPr>
           <a:xfrm>
-            <a:off x="8260777" y="2811364"/>
+            <a:off x="8242931" y="2811364"/>
             <a:ext cx="2286000" cy="344978"/>
           </a:xfrm>
           <a:prstGeom prst="rect">
@@ -10935,7 +10935,7 @@
                 </a:solidFill>
                 <a:latin typeface="Helvetica Neue"/>
               </a:rPr>
-              <a:t>46,320 views · 13 posts</a:t>
+              <a:t>46,344 views · 13 posts</a:t>
             </a:r>
           </a:p>
         </p:txBody>
@@ -10983,7 +10983,7 @@
         <p:spPr>
           <a:xfrm>
             <a:off x="4114800" y="3238638"/>
-            <a:ext cx="3330900" cy="143810"/>
+            <a:ext cx="3473833" cy="143810"/>
           </a:xfrm>
           <a:prstGeom prst="rect">
             <a:avLst/>
@@ -11026,7 +11026,7 @@
         </p:nvSpPr>
         <p:spPr>
           <a:xfrm>
-            <a:off x="7537140" y="3156342"/>
+            <a:off x="7680073" y="3156342"/>
             <a:ext cx="2286000" cy="344978"/>
           </a:xfrm>
           <a:prstGeom prst="rect">
@@ -11047,7 +11047,7 @@
                 </a:solidFill>
                 <a:latin typeface="Helvetica Neue"/>
               </a:rPr>
-              <a:t>38,053 views · 54 posts</a:t>
+              <a:t>39,882 views · 56 posts</a:t>
             </a:r>
           </a:p>
         </p:txBody>
@@ -11095,7 +11095,7 @@
         <p:spPr>
           <a:xfrm>
             <a:off x="4114800" y="3583616"/>
-            <a:ext cx="3239690" cy="143810"/>
+            <a:ext cx="3225068" cy="143810"/>
           </a:xfrm>
           <a:prstGeom prst="rect">
             <a:avLst/>
@@ -11138,7 +11138,7 @@
         </p:nvSpPr>
         <p:spPr>
           <a:xfrm>
-            <a:off x="7445930" y="3501320"/>
+            <a:off x="7431308" y="3501320"/>
             <a:ext cx="2286000" cy="344978"/>
           </a:xfrm>
           <a:prstGeom prst="rect">
@@ -11159,7 +11159,7 @@
                 </a:solidFill>
                 <a:latin typeface="Helvetica Neue"/>
               </a:rPr>
-              <a:t>37,011 views · 25 posts</a:t>
+              <a:t>37,026 views · 27 posts</a:t>
             </a:r>
           </a:p>
         </p:txBody>
@@ -11207,7 +11207,7 @@
         <p:spPr>
           <a:xfrm>
             <a:off x="4114800" y="3928594"/>
-            <a:ext cx="2275162" cy="143810"/>
+            <a:ext cx="2441317" cy="143810"/>
           </a:xfrm>
           <a:prstGeom prst="rect">
             <a:avLst/>
@@ -11250,7 +11250,7 @@
         </p:nvSpPr>
         <p:spPr>
           <a:xfrm>
-            <a:off x="6481402" y="3846298"/>
+            <a:off x="6647557" y="3846298"/>
             <a:ext cx="2286000" cy="344978"/>
           </a:xfrm>
           <a:prstGeom prst="rect">
@@ -11271,7 +11271,7 @@
                 </a:solidFill>
                 <a:latin typeface="Helvetica Neue"/>
               </a:rPr>
-              <a:t>25,992 views · 31 posts</a:t>
+              <a:t>28,028 views · 35 posts</a:t>
             </a:r>
           </a:p>
         </p:txBody>
@@ -11319,7 +11319,7 @@
         <p:spPr>
           <a:xfrm>
             <a:off x="4114800" y="4273573"/>
-            <a:ext cx="2090817" cy="143810"/>
+            <a:ext cx="2087679" cy="143810"/>
           </a:xfrm>
           <a:prstGeom prst="rect">
             <a:avLst/>
@@ -11362,7 +11362,7 @@
         </p:nvSpPr>
         <p:spPr>
           <a:xfrm>
-            <a:off x="6297057" y="4191277"/>
+            <a:off x="6293919" y="4191277"/>
             <a:ext cx="2286000" cy="344978"/>
           </a:xfrm>
           <a:prstGeom prst="rect">
@@ -11383,7 +11383,7 @@
                 </a:solidFill>
                 <a:latin typeface="Helvetica Neue"/>
               </a:rPr>
-              <a:t>23,886 views · 31 posts</a:t>
+              <a:t>23,968 views · 31 posts</a:t>
             </a:r>
           </a:p>
         </p:txBody>
@@ -11431,7 +11431,7 @@
         <p:spPr>
           <a:xfrm>
             <a:off x="4114800" y="4618551"/>
-            <a:ext cx="705517" cy="143810"/>
+            <a:ext cx="705793" cy="143810"/>
           </a:xfrm>
           <a:prstGeom prst="rect">
             <a:avLst/>
@@ -11474,7 +11474,7 @@
         </p:nvSpPr>
         <p:spPr>
           <a:xfrm>
-            <a:off x="4911757" y="4536255"/>
+            <a:off x="4912033" y="4536255"/>
             <a:ext cx="2286000" cy="344978"/>
           </a:xfrm>
           <a:prstGeom prst="rect">
@@ -11495,7 +11495,7 @@
                 </a:solidFill>
                 <a:latin typeface="Helvetica Neue"/>
               </a:rPr>
-              <a:t>8,060 views · 6 posts</a:t>
+              <a:t>8,103 views · 6 posts</a:t>
             </a:r>
           </a:p>
         </p:txBody>
@@ -11543,7 +11543,7 @@
         <p:spPr>
           <a:xfrm>
             <a:off x="4114800" y="4963529"/>
-            <a:ext cx="353984" cy="143810"/>
+            <a:ext cx="352243" cy="143810"/>
           </a:xfrm>
           <a:prstGeom prst="rect">
             <a:avLst/>
@@ -11586,7 +11586,7 @@
         </p:nvSpPr>
         <p:spPr>
           <a:xfrm>
-            <a:off x="4560224" y="4881233"/>
+            <a:off x="4558483" y="4881233"/>
             <a:ext cx="2286000" cy="344978"/>
           </a:xfrm>
           <a:prstGeom prst="rect">
@@ -11655,7 +11655,7 @@
         <p:spPr>
           <a:xfrm>
             <a:off x="4114800" y="5308507"/>
-            <a:ext cx="294199" cy="143810"/>
+            <a:ext cx="293275" cy="143810"/>
           </a:xfrm>
           <a:prstGeom prst="rect">
             <a:avLst/>
@@ -11698,7 +11698,7 @@
         </p:nvSpPr>
         <p:spPr>
           <a:xfrm>
-            <a:off x="4500439" y="5226211"/>
+            <a:off x="4499515" y="5226211"/>
             <a:ext cx="2286000" cy="344978"/>
           </a:xfrm>
           <a:prstGeom prst="rect">
@@ -11719,7 +11719,7 @@
                 </a:solidFill>
                 <a:latin typeface="Helvetica Neue"/>
               </a:rPr>
-              <a:t>3,361 views · 6 posts</a:t>
+              <a:t>3,367 views · 6 posts</a:t>
             </a:r>
           </a:p>
         </p:txBody>
@@ -11767,7 +11767,7 @@
         <p:spPr>
           <a:xfrm>
             <a:off x="4114800" y="5653485"/>
-            <a:ext cx="95411" cy="143810"/>
+            <a:ext cx="95203" cy="143810"/>
           </a:xfrm>
           <a:prstGeom prst="rect">
             <a:avLst/>
@@ -11810,7 +11810,7 @@
         </p:nvSpPr>
         <p:spPr>
           <a:xfrm>
-            <a:off x="4301651" y="5571189"/>
+            <a:off x="4301443" y="5571189"/>
             <a:ext cx="2286000" cy="344978"/>
           </a:xfrm>
           <a:prstGeom prst="rect">
@@ -11831,7 +11831,7 @@
                 </a:solidFill>
                 <a:latin typeface="Helvetica Neue"/>
               </a:rPr>
-              <a:t>1,090 views · 2 posts</a:t>
+              <a:t>1,093 views · 2 posts</a:t>
             </a:r>
           </a:p>
         </p:txBody>
@@ -12185,7 +12185,7 @@
                 </a:solidFill>
                 <a:latin typeface="Georgia"/>
               </a:rPr>
-              <a:t>71,035</a:t>
+              <a:t>71,386</a:t>
             </a:r>
           </a:p>
         </p:txBody>
@@ -12219,7 +12219,7 @@
                 </a:solidFill>
                 <a:latin typeface="Helvetica Neue"/>
               </a:rPr>
-              <a:t>21 posts · 1,431 likes</a:t>
+              <a:t>21 posts · 1,435 likes</a:t>
             </a:r>
           </a:p>
         </p:txBody>
@@ -12253,7 +12253,7 @@
                 </a:solidFill>
                 <a:latin typeface="Helvetica Neue"/>
               </a:rPr>
-              <a:t>3,383 average views per post</a:t>
+              <a:t>3,399 average views per post</a:t>
             </a:r>
           </a:p>
         </p:txBody>
@@ -12409,7 +12409,7 @@
                 </a:solidFill>
                 <a:latin typeface="Helvetica Neue"/>
               </a:rPr>
-              <a:t>#1  ·  TT  ·  27,000 views</a:t>
+              <a:t>#1  ·  TT  ·  27,200 views</a:t>
             </a:r>
           </a:p>
         </p:txBody>
@@ -12565,7 +12565,7 @@
                 </a:solidFill>
                 <a:latin typeface="Helvetica Neue"/>
               </a:rPr>
-              <a:t>#2  ·  IG  ·  15,867 views</a:t>
+              <a:t>#2  ·  IG  ·  15,935 views</a:t>
             </a:r>
           </a:p>
         </p:txBody>
@@ -12721,7 +12721,7 @@
                 </a:solidFill>
                 <a:latin typeface="Helvetica Neue"/>
               </a:rPr>
-              <a:t>#3  ·  FB  ·  6,322 views</a:t>
+              <a:t>#3  ·  FB  ·  6,341 views</a:t>
             </a:r>
           </a:p>
         </p:txBody>
@@ -13187,7 +13187,7 @@
                 </a:solidFill>
                 <a:latin typeface="Georgia"/>
               </a:rPr>
-              <a:t>69,597</a:t>
+              <a:t>69,600</a:t>
             </a:r>
           </a:p>
         </p:txBody>
@@ -14189,7 +14189,7 @@
                 </a:solidFill>
                 <a:latin typeface="Georgia"/>
               </a:rPr>
-              <a:t>46,320</a:t>
+              <a:t>46,344</a:t>
             </a:r>
           </a:p>
         </p:txBody>
@@ -14257,7 +14257,7 @@
                 </a:solidFill>
                 <a:latin typeface="Helvetica Neue"/>
               </a:rPr>
-              <a:t>3,563 average views per post</a:t>
+              <a:t>3,565 average views per post</a:t>
             </a:r>
           </a:p>
         </p:txBody>
@@ -15191,7 +15191,7 @@
                 </a:solidFill>
                 <a:latin typeface="Georgia"/>
               </a:rPr>
-              <a:t>38,053</a:t>
+              <a:t>39,882</a:t>
             </a:r>
           </a:p>
         </p:txBody>
@@ -15225,7 +15225,7 @@
                 </a:solidFill>
                 <a:latin typeface="Helvetica Neue"/>
               </a:rPr>
-              <a:t>54 posts · 878 likes</a:t>
+              <a:t>56 posts · 924 likes</a:t>
             </a:r>
           </a:p>
         </p:txBody>
@@ -15259,7 +15259,7 @@
                 </a:solidFill>
                 <a:latin typeface="Helvetica Neue"/>
               </a:rPr>
-              <a:t>705 average views per post</a:t>
+              <a:t>712 average views per post</a:t>
             </a:r>
           </a:p>
         </p:txBody>
@@ -15415,7 +15415,7 @@
                 </a:solidFill>
                 <a:latin typeface="Helvetica Neue"/>
               </a:rPr>
-              <a:t>#1  ·  IG  ·  5,142 views</a:t>
+              <a:t>#1  ·  IG  ·  5,443 views</a:t>
             </a:r>
           </a:p>
         </p:txBody>
@@ -16193,7 +16193,7 @@
                 </a:solidFill>
                 <a:latin typeface="Georgia"/>
               </a:rPr>
-              <a:t>37,011</a:t>
+              <a:t>37,026</a:t>
             </a:r>
           </a:p>
         </p:txBody>
@@ -16227,7 +16227,7 @@
                 </a:solidFill>
                 <a:latin typeface="Helvetica Neue"/>
               </a:rPr>
-              <a:t>25 posts · 1,351 likes</a:t>
+              <a:t>27 posts · 1,387 likes</a:t>
             </a:r>
           </a:p>
         </p:txBody>
@@ -16261,7 +16261,7 @@
                 </a:solidFill>
                 <a:latin typeface="Helvetica Neue"/>
               </a:rPr>
-              <a:t>1,480 average views per post</a:t>
+              <a:t>1,371 average views per post</a:t>
             </a:r>
           </a:p>
         </p:txBody>
@@ -17195,7 +17195,7 @@
                 </a:solidFill>
                 <a:latin typeface="Georgia"/>
               </a:rPr>
-              <a:t>25,992</a:t>
+              <a:t>28,028</a:t>
             </a:r>
           </a:p>
         </p:txBody>
@@ -17229,7 +17229,7 @@
                 </a:solidFill>
                 <a:latin typeface="Helvetica Neue"/>
               </a:rPr>
-              <a:t>31 posts · 431 likes</a:t>
+              <a:t>35 posts · 481 likes</a:t>
             </a:r>
           </a:p>
         </p:txBody>
@@ -17263,7 +17263,7 @@
                 </a:solidFill>
                 <a:latin typeface="Helvetica Neue"/>
               </a:rPr>
-              <a:t>838 average views per post</a:t>
+              <a:t>801 average views per post</a:t>
             </a:r>
           </a:p>
         </p:txBody>
@@ -18197,7 +18197,7 @@
                 </a:solidFill>
                 <a:latin typeface="Georgia"/>
               </a:rPr>
-              <a:t>23,886</a:t>
+              <a:t>23,968</a:t>
             </a:r>
           </a:p>
         </p:txBody>
@@ -18231,7 +18231,7 @@
                 </a:solidFill>
                 <a:latin typeface="Helvetica Neue"/>
               </a:rPr>
-              <a:t>31 posts · 492 likes</a:t>
+              <a:t>31 posts · 504 likes</a:t>
             </a:r>
           </a:p>
         </p:txBody>
@@ -18265,7 +18265,7 @@
                 </a:solidFill>
                 <a:latin typeface="Helvetica Neue"/>
               </a:rPr>
-              <a:t>771 average views per post</a:t>
+              <a:t>773 average views per post</a:t>
             </a:r>
           </a:p>
         </p:txBody>

--- a/SPONSOR_CONTENT_REPORT.pptx
+++ b/SPONSOR_CONTENT_REPORT.pptx
@@ -3322,7 +3322,7 @@
                 </a:solidFill>
                 <a:latin typeface="Helvetica Neue"/>
               </a:rPr>
-              <a:t>Reporting window: Jun 8 → 2026-07-20</a:t>
+              <a:t>Reporting window: Jun 8 → 2026-07-22</a:t>
             </a:r>
           </a:p>
         </p:txBody>
@@ -3744,7 +3744,7 @@
                 </a:solidFill>
                 <a:latin typeface="Georgia"/>
               </a:rPr>
-              <a:t>8,103</a:t>
+              <a:t>7,302</a:t>
             </a:r>
           </a:p>
         </p:txBody>
@@ -3812,7 +3812,7 @@
                 </a:solidFill>
                 <a:latin typeface="Helvetica Neue"/>
               </a:rPr>
-              <a:t>1,350 average views per post</a:t>
+              <a:t>1,217 average views per post</a:t>
             </a:r>
           </a:p>
         </p:txBody>
@@ -4280,7 +4280,7 @@
                 </a:solidFill>
                 <a:latin typeface="Helvetica Neue"/>
               </a:rPr>
-              <a:t>#3  ·  IG  ·  819 views</a:t>
+              <a:t>#3  ·  FB  ·  795 views</a:t>
             </a:r>
           </a:p>
         </p:txBody>
@@ -4314,7 +4314,7 @@
                 </a:solidFill>
                 <a:latin typeface="Helvetica Neue"/>
               </a:rPr>
-              <a:t>Running a restaurant means always wearing a smile, even when things are falling apart. You</a:t>
+              <a:t>Running a restaurant means the show must go on, even when things are falling apart. Unlike</a:t>
             </a:r>
           </a:p>
         </p:txBody>
@@ -4556,7 +4556,7 @@
                 </a:solidFill>
                 <a:latin typeface="Georgia"/>
               </a:rPr>
-              <a:t>Political Individual Highlights</a:t>
+              <a:t>American Pride</a:t>
             </a:r>
           </a:p>
         </p:txBody>
@@ -4590,7 +4590,7 @@
                 </a:solidFill>
                 <a:latin typeface="Helvetica Neue"/>
               </a:rPr>
-              <a:t>Candidate/elected personality profiles — Carrie Uva, Hector Sosa. Not scandal-driven; just meet-the-person.</a:t>
+              <a:t>Patriotic content — July 4th, veterans, pride pieces.</a:t>
             </a:r>
           </a:p>
         </p:txBody>
@@ -4654,7 +4654,7 @@
             <a:avLst/>
           </a:prstGeom>
           <a:solidFill>
-            <a:srgbClr val="2E86AB"/>
+            <a:srgbClr val="990011"/>
           </a:solidFill>
           <a:ln>
             <a:noFill/>
@@ -4708,7 +4708,7 @@
             <a:r>
               <a:rPr sz="1100" b="1">
                 <a:solidFill>
-                  <a:srgbClr val="2E86AB"/>
+                  <a:srgbClr val="990011"/>
                 </a:solidFill>
                 <a:latin typeface="Helvetica Neue"/>
               </a:rPr>
@@ -4746,7 +4746,7 @@
                 </a:solidFill>
                 <a:latin typeface="Georgia"/>
               </a:rPr>
-              <a:t>4,044</a:t>
+              <a:t>4,239</a:t>
             </a:r>
           </a:p>
         </p:txBody>
@@ -4780,7 +4780,7 @@
                 </a:solidFill>
                 <a:latin typeface="Helvetica Neue"/>
               </a:rPr>
-              <a:t>7 posts · 58 likes</a:t>
+              <a:t>7 posts · 155 likes</a:t>
             </a:r>
           </a:p>
         </p:txBody>
@@ -4814,7 +4814,7 @@
                 </a:solidFill>
                 <a:latin typeface="Helvetica Neue"/>
               </a:rPr>
-              <a:t>578 average views per post</a:t>
+              <a:t>606 average views per post</a:t>
             </a:r>
           </a:p>
         </p:txBody>
@@ -4844,7 +4844,7 @@
             <a:r>
               <a:rPr sz="1100" b="1">
                 <a:solidFill>
-                  <a:srgbClr val="2E86AB"/>
+                  <a:srgbClr val="990011"/>
                 </a:solidFill>
                 <a:latin typeface="Helvetica Neue"/>
               </a:rPr>
@@ -4912,7 +4912,7 @@
             <a:avLst/>
           </a:prstGeom>
           <a:solidFill>
-            <a:srgbClr val="2E86AB"/>
+            <a:srgbClr val="990011"/>
           </a:solidFill>
           <a:ln>
             <a:noFill/>
@@ -4966,11 +4966,11 @@
             <a:r>
               <a:rPr sz="1000" b="1">
                 <a:solidFill>
-                  <a:srgbClr val="2E86AB"/>
-                </a:solidFill>
-                <a:latin typeface="Helvetica Neue"/>
-              </a:rPr>
-              <a:t>#1  ·  FB  ·  965 views</a:t>
+                  <a:srgbClr val="990011"/>
+                </a:solidFill>
+                <a:latin typeface="Helvetica Neue"/>
+              </a:rPr>
+              <a:t>#1  ·  TT  ·  1,098 views</a:t>
             </a:r>
           </a:p>
         </p:txBody>
@@ -5004,7 +5004,7 @@
                 </a:solidFill>
                 <a:latin typeface="Helvetica Neue"/>
               </a:rPr>
-              <a:t>Carrie's reputation for helping seniors with wills and trusts is outstanding. Many speak o</a:t>
+              <a:t>Embarrassed to be American? Pride in this country is essential, espec...</a:t>
             </a:r>
           </a:p>
         </p:txBody>
@@ -5068,7 +5068,7 @@
             <a:avLst/>
           </a:prstGeom>
           <a:solidFill>
-            <a:srgbClr val="2E86AB"/>
+            <a:srgbClr val="990011"/>
           </a:solidFill>
           <a:ln>
             <a:noFill/>
@@ -5122,11 +5122,11 @@
             <a:r>
               <a:rPr sz="1000" b="1">
                 <a:solidFill>
-                  <a:srgbClr val="2E86AB"/>
-                </a:solidFill>
-                <a:latin typeface="Helvetica Neue"/>
-              </a:rPr>
-              <a:t>#2  ·  IG  ·  802 views</a:t>
+                  <a:srgbClr val="990011"/>
+                </a:solidFill>
+                <a:latin typeface="Helvetica Neue"/>
+              </a:rPr>
+              <a:t>#2  ·  TT  ·  870 views</a:t>
             </a:r>
           </a:p>
         </p:txBody>
@@ -5160,7 +5160,7 @@
                 </a:solidFill>
                 <a:latin typeface="Helvetica Neue"/>
               </a:rPr>
-              <a:t>Carrie, you're known for helping seniors with wills and trusts. It's more than a business;</a:t>
+              <a:t>13 years in the Army and they paid for college. Psychology degree achieved! You can enlist</a:t>
             </a:r>
           </a:p>
         </p:txBody>
@@ -5224,7 +5224,7 @@
             <a:avLst/>
           </a:prstGeom>
           <a:solidFill>
-            <a:srgbClr val="2E86AB"/>
+            <a:srgbClr val="990011"/>
           </a:solidFill>
           <a:ln>
             <a:noFill/>
@@ -5278,11 +5278,11 @@
             <a:r>
               <a:rPr sz="1000" b="1">
                 <a:solidFill>
-                  <a:srgbClr val="2E86AB"/>
-                </a:solidFill>
-                <a:latin typeface="Helvetica Neue"/>
-              </a:rPr>
-              <a:t>#3  ·  FB  ·  604 views</a:t>
+                  <a:srgbClr val="990011"/>
+                </a:solidFill>
+                <a:latin typeface="Helvetica Neue"/>
+              </a:rPr>
+              <a:t>#3  ·  FB  ·  797 views</a:t>
             </a:r>
           </a:p>
         </p:txBody>
@@ -5316,7 +5316,7 @@
                 </a:solidFill>
                 <a:latin typeface="Helvetica Neue"/>
               </a:rPr>
-              <a:t>Carrie Uva shares her commitment to public safety, quality of life, maintaining a balanced</a:t>
+              <a:t>The World Cup is a massive moneymaker for FIFA, projected to generate $11 billion in profi</a:t>
             </a:r>
           </a:p>
         </p:txBody>
@@ -5390,7 +5390,7 @@
             <a:r>
               <a:rPr sz="1000" b="1">
                 <a:solidFill>
-                  <a:srgbClr val="2E86AB"/>
+                  <a:srgbClr val="990011"/>
                 </a:solidFill>
                 <a:latin typeface="Helvetica Neue"/>
               </a:rPr>
@@ -5558,7 +5558,7 @@
                 </a:solidFill>
                 <a:latin typeface="Georgia"/>
               </a:rPr>
-              <a:t>American Pride</a:t>
+              <a:t>Political Individual Highlights</a:t>
             </a:r>
           </a:p>
         </p:txBody>
@@ -5592,7 +5592,7 @@
                 </a:solidFill>
                 <a:latin typeface="Helvetica Neue"/>
               </a:rPr>
-              <a:t>Patriotic content — July 4th, veterans, pride pieces.</a:t>
+              <a:t>Candidate/elected personality profiles — Carrie Uva, Hector Sosa. Not scandal-driven; just meet-the-person.</a:t>
             </a:r>
           </a:p>
         </p:txBody>
@@ -5656,7 +5656,7 @@
             <a:avLst/>
           </a:prstGeom>
           <a:solidFill>
-            <a:srgbClr val="990011"/>
+            <a:srgbClr val="2E86AB"/>
           </a:solidFill>
           <a:ln>
             <a:noFill/>
@@ -5710,7 +5710,7 @@
             <a:r>
               <a:rPr sz="1100" b="1">
                 <a:solidFill>
-                  <a:srgbClr val="990011"/>
+                  <a:srgbClr val="2E86AB"/>
                 </a:solidFill>
                 <a:latin typeface="Helvetica Neue"/>
               </a:rPr>
@@ -5748,7 +5748,7 @@
                 </a:solidFill>
                 <a:latin typeface="Georgia"/>
               </a:rPr>
-              <a:t>3,367</a:t>
+              <a:t>4,044</a:t>
             </a:r>
           </a:p>
         </p:txBody>
@@ -5782,7 +5782,7 @@
                 </a:solidFill>
                 <a:latin typeface="Helvetica Neue"/>
               </a:rPr>
-              <a:t>6 posts · 106 likes</a:t>
+              <a:t>7 posts · 58 likes</a:t>
             </a:r>
           </a:p>
         </p:txBody>
@@ -5816,7 +5816,7 @@
                 </a:solidFill>
                 <a:latin typeface="Helvetica Neue"/>
               </a:rPr>
-              <a:t>561 average views per post</a:t>
+              <a:t>578 average views per post</a:t>
             </a:r>
           </a:p>
         </p:txBody>
@@ -5846,7 +5846,7 @@
             <a:r>
               <a:rPr sz="1100" b="1">
                 <a:solidFill>
-                  <a:srgbClr val="990011"/>
+                  <a:srgbClr val="2E86AB"/>
                 </a:solidFill>
                 <a:latin typeface="Helvetica Neue"/>
               </a:rPr>
@@ -5914,7 +5914,7 @@
             <a:avLst/>
           </a:prstGeom>
           <a:solidFill>
-            <a:srgbClr val="990011"/>
+            <a:srgbClr val="2E86AB"/>
           </a:solidFill>
           <a:ln>
             <a:noFill/>
@@ -5968,11 +5968,11 @@
             <a:r>
               <a:rPr sz="1000" b="1">
                 <a:solidFill>
-                  <a:srgbClr val="990011"/>
-                </a:solidFill>
-                <a:latin typeface="Helvetica Neue"/>
-              </a:rPr>
-              <a:t>#1  ·  TT  ·  1,098 views</a:t>
+                  <a:srgbClr val="2E86AB"/>
+                </a:solidFill>
+                <a:latin typeface="Helvetica Neue"/>
+              </a:rPr>
+              <a:t>#1  ·  FB  ·  965 views</a:t>
             </a:r>
           </a:p>
         </p:txBody>
@@ -6006,7 +6006,7 @@
                 </a:solidFill>
                 <a:latin typeface="Helvetica Neue"/>
               </a:rPr>
-              <a:t>Embarrassed to be American? Pride in this country is essential, espec...</a:t>
+              <a:t>Carrie's reputation for helping seniors with wills and trusts is outstanding. Many speak o</a:t>
             </a:r>
           </a:p>
         </p:txBody>
@@ -6070,7 +6070,7 @@
             <a:avLst/>
           </a:prstGeom>
           <a:solidFill>
-            <a:srgbClr val="990011"/>
+            <a:srgbClr val="2E86AB"/>
           </a:solidFill>
           <a:ln>
             <a:noFill/>
@@ -6124,11 +6124,11 @@
             <a:r>
               <a:rPr sz="1000" b="1">
                 <a:solidFill>
-                  <a:srgbClr val="990011"/>
-                </a:solidFill>
-                <a:latin typeface="Helvetica Neue"/>
-              </a:rPr>
-              <a:t>#2  ·  FB  ·  797 views</a:t>
+                  <a:srgbClr val="2E86AB"/>
+                </a:solidFill>
+                <a:latin typeface="Helvetica Neue"/>
+              </a:rPr>
+              <a:t>#2  ·  IG  ·  802 views</a:t>
             </a:r>
           </a:p>
         </p:txBody>
@@ -6162,7 +6162,7 @@
                 </a:solidFill>
                 <a:latin typeface="Helvetica Neue"/>
               </a:rPr>
-              <a:t>The World Cup is a massive moneymaker for FIFA, projected to generate $11 billion in profi</a:t>
+              <a:t>Carrie, you're known for helping seniors with wills and trusts. It's more than a business;</a:t>
             </a:r>
           </a:p>
         </p:txBody>
@@ -6226,7 +6226,7 @@
             <a:avLst/>
           </a:prstGeom>
           <a:solidFill>
-            <a:srgbClr val="990011"/>
+            <a:srgbClr val="2E86AB"/>
           </a:solidFill>
           <a:ln>
             <a:noFill/>
@@ -6280,11 +6280,11 @@
             <a:r>
               <a:rPr sz="1000" b="1">
                 <a:solidFill>
-                  <a:srgbClr val="990011"/>
-                </a:solidFill>
-                <a:latin typeface="Helvetica Neue"/>
-              </a:rPr>
-              <a:t>#3  ·  IG  ·  664 views</a:t>
+                  <a:srgbClr val="2E86AB"/>
+                </a:solidFill>
+                <a:latin typeface="Helvetica Neue"/>
+              </a:rPr>
+              <a:t>#3  ·  FB  ·  604 views</a:t>
             </a:r>
           </a:p>
         </p:txBody>
@@ -6318,7 +6318,7 @@
                 </a:solidFill>
                 <a:latin typeface="Helvetica Neue"/>
               </a:rPr>
-              <a:t>Founding Fathers signed their death warrant declaring independence. The Declaration is jus</a:t>
+              <a:t>Carrie Uva shares her commitment to public safety, quality of life, maintaining a balanced</a:t>
             </a:r>
           </a:p>
         </p:txBody>
@@ -6392,7 +6392,7 @@
             <a:r>
               <a:rPr sz="1000" b="1">
                 <a:solidFill>
-                  <a:srgbClr val="990011"/>
+                  <a:srgbClr val="2E86AB"/>
                 </a:solidFill>
                 <a:latin typeface="Helvetica Neue"/>
               </a:rPr>
@@ -6750,7 +6750,7 @@
                 </a:solidFill>
                 <a:latin typeface="Georgia"/>
               </a:rPr>
-              <a:t>1,093</a:t>
+              <a:t>1,100</a:t>
             </a:r>
           </a:p>
         </p:txBody>
@@ -6784,7 +6784,7 @@
                 </a:solidFill>
                 <a:latin typeface="Helvetica Neue"/>
               </a:rPr>
-              <a:t>2 posts · 16 likes</a:t>
+              <a:t>2 posts · 17 likes</a:t>
             </a:r>
           </a:p>
         </p:txBody>
@@ -6818,7 +6818,7 @@
                 </a:solidFill>
                 <a:latin typeface="Helvetica Neue"/>
               </a:rPr>
-              <a:t>546 average views per post</a:t>
+              <a:t>550 average views per post</a:t>
             </a:r>
           </a:p>
         </p:txBody>
@@ -6974,7 +6974,7 @@
                 </a:solidFill>
                 <a:latin typeface="Helvetica Neue"/>
               </a:rPr>
-              <a:t>#1  ·  FB  ·  697 views</a:t>
+              <a:t>#1  ·  FB  ·  698 views</a:t>
             </a:r>
           </a:p>
         </p:txBody>
@@ -7130,7 +7130,7 @@
                 </a:solidFill>
                 <a:latin typeface="Helvetica Neue"/>
               </a:rPr>
-              <a:t>#2  ·  TT  ·  396 views</a:t>
+              <a:t>#2  ·  TT  ·  402 views</a:t>
             </a:r>
           </a:p>
         </p:txBody>
@@ -8500,7 +8500,7 @@
                 </a:solidFill>
                 <a:latin typeface="Helvetica Neue"/>
               </a:rPr>
-              <a:t>2,578 avg views/post   ·   27 posts   ·   69,600 total</a:t>
+              <a:t>2,578 avg views/post   ·   27 posts   ·   69,601 total</a:t>
             </a:r>
           </a:p>
         </p:txBody>
@@ -8792,7 +8792,7 @@
                 </a:solidFill>
                 <a:latin typeface="Helvetica Neue"/>
               </a:rPr>
-              <a:t>1,365 avg views/post   ·   90 posts   ·   122,852 total</a:t>
+              <a:t>1,276 avg views/post   ·   96 posts   ·   122,536 total</a:t>
             </a:r>
           </a:p>
         </p:txBody>
@@ -10633,7 +10633,7 @@
                 </a:solidFill>
                 <a:latin typeface="Helvetica Neue"/>
               </a:rPr>
-              <a:t>FIFA / World Cup</a:t>
+              <a:t>Truth &amp; Scandal Reporting</a:t>
             </a:r>
           </a:p>
         </p:txBody>
@@ -10648,6 +10648,118 @@
           <a:xfrm>
             <a:off x="4114800" y="2203703"/>
             <a:ext cx="6217920" cy="143810"/>
+          </a:xfrm>
+          <a:prstGeom prst="rect">
+            <a:avLst/>
+          </a:prstGeom>
+          <a:solidFill>
+            <a:srgbClr val="990011"/>
+          </a:solidFill>
+          <a:ln>
+            <a:noFill/>
+          </a:ln>
+          <a:effectLst/>
+        </p:spPr>
+        <p:style>
+          <a:lnRef idx="1">
+            <a:schemeClr val="accent1"/>
+          </a:lnRef>
+          <a:fillRef idx="3">
+            <a:schemeClr val="accent1"/>
+          </a:fillRef>
+          <a:effectRef idx="2">
+            <a:schemeClr val="accent1"/>
+          </a:effectRef>
+          <a:fontRef idx="minor">
+            <a:schemeClr val="lt1"/>
+          </a:fontRef>
+        </p:style>
+        <p:txBody>
+          <a:bodyPr rtlCol="0" anchor="ctr"/>
+          <a:lstStyle/>
+          <a:p>
+            <a:pPr algn="ctr"/>
+          </a:p>
+        </p:txBody>
+      </p:sp>
+      <p:sp>
+        <p:nvSpPr>
+          <p:cNvPr id="8" name="TextBox 7"/>
+          <p:cNvSpPr txBox="1"/>
+          <p:nvPr/>
+        </p:nvSpPr>
+        <p:spPr>
+          <a:xfrm>
+            <a:off x="10424160" y="2121408"/>
+            <a:ext cx="2286000" cy="344978"/>
+          </a:xfrm>
+          <a:prstGeom prst="rect">
+            <a:avLst/>
+          </a:prstGeom>
+          <a:noFill/>
+        </p:spPr>
+        <p:txBody>
+          <a:bodyPr wrap="square" lIns="0" rIns="0" tIns="0" bIns="0">
+            <a:spAutoFit/>
+          </a:bodyPr>
+          <a:lstStyle/>
+          <a:p>
+            <a:r>
+              <a:rPr sz="900" b="0">
+                <a:solidFill>
+                  <a:srgbClr val="6B7082"/>
+                </a:solidFill>
+                <a:latin typeface="Helvetica Neue"/>
+              </a:rPr>
+              <a:t>69,601 views · 27 posts</a:t>
+            </a:r>
+          </a:p>
+        </p:txBody>
+      </p:sp>
+      <p:sp>
+        <p:nvSpPr>
+          <p:cNvPr id="9" name="TextBox 8"/>
+          <p:cNvSpPr txBox="1"/>
+          <p:nvPr/>
+        </p:nvSpPr>
+        <p:spPr>
+          <a:xfrm>
+            <a:off x="731520" y="2466386"/>
+            <a:ext cx="3200400" cy="344978"/>
+          </a:xfrm>
+          <a:prstGeom prst="rect">
+            <a:avLst/>
+          </a:prstGeom>
+          <a:noFill/>
+        </p:spPr>
+        <p:txBody>
+          <a:bodyPr wrap="square" lIns="0" rIns="0" tIns="0" bIns="0">
+            <a:spAutoFit/>
+          </a:bodyPr>
+          <a:lstStyle/>
+          <a:p>
+            <a:r>
+              <a:rPr sz="1100" b="1">
+                <a:solidFill>
+                  <a:srgbClr val="141833"/>
+                </a:solidFill>
+                <a:latin typeface="Helvetica Neue"/>
+              </a:rPr>
+              <a:t>FIFA / World Cup</a:t>
+            </a:r>
+          </a:p>
+        </p:txBody>
+      </p:sp>
+      <p:sp>
+        <p:nvSpPr>
+          <p:cNvPr id="10" name="Rectangle 9"/>
+          <p:cNvSpPr/>
+          <p:nvPr/>
+        </p:nvSpPr>
+        <p:spPr>
+          <a:xfrm>
+            <a:off x="4114800" y="2548682"/>
+            <a:ext cx="5456057" cy="143810"/>
           </a:xfrm>
           <a:prstGeom prst="rect">
             <a:avLst/>
@@ -10684,13 +10796,13 @@
       </p:sp>
       <p:sp>
         <p:nvSpPr>
-          <p:cNvPr id="8" name="TextBox 7"/>
-          <p:cNvSpPr txBox="1"/>
-          <p:nvPr/>
-        </p:nvSpPr>
-        <p:spPr>
-          <a:xfrm>
-            <a:off x="10424160" y="2121408"/>
+          <p:cNvPr id="11" name="TextBox 10"/>
+          <p:cNvSpPr txBox="1"/>
+          <p:nvPr/>
+        </p:nvSpPr>
+        <p:spPr>
+          <a:xfrm>
+            <a:off x="9662297" y="2466386"/>
             <a:ext cx="2286000" cy="344978"/>
           </a:xfrm>
           <a:prstGeom prst="rect">
@@ -10711,20 +10823,20 @@
                 </a:solidFill>
                 <a:latin typeface="Helvetica Neue"/>
               </a:rPr>
-              <a:t>71,386 views · 21 posts</a:t>
-            </a:r>
-          </a:p>
-        </p:txBody>
-      </p:sp>
-      <p:sp>
-        <p:nvSpPr>
-          <p:cNvPr id="9" name="TextBox 8"/>
-          <p:cNvSpPr txBox="1"/>
-          <p:nvPr/>
-        </p:nvSpPr>
-        <p:spPr>
-          <a:xfrm>
-            <a:off x="731520" y="2466386"/>
+              <a:t>61,073 views · 21 posts</a:t>
+            </a:r>
+          </a:p>
+        </p:txBody>
+      </p:sp>
+      <p:sp>
+        <p:nvSpPr>
+          <p:cNvPr id="12" name="TextBox 11"/>
+          <p:cNvSpPr txBox="1"/>
+          <p:nvPr/>
+        </p:nvSpPr>
+        <p:spPr>
+          <a:xfrm>
+            <a:off x="731520" y="2811364"/>
             <a:ext cx="3200400" cy="344978"/>
           </a:xfrm>
           <a:prstGeom prst="rect">
@@ -10745,21 +10857,693 @@
                 </a:solidFill>
                 <a:latin typeface="Helvetica Neue"/>
               </a:rPr>
-              <a:t>Truth &amp; Scandal Reporting</a:t>
-            </a:r>
-          </a:p>
-        </p:txBody>
-      </p:sp>
-      <p:sp>
-        <p:nvSpPr>
-          <p:cNvPr id="10" name="Rectangle 9"/>
+              <a:t>Downtown Development</a:t>
+            </a:r>
+          </a:p>
+        </p:txBody>
+      </p:sp>
+      <p:sp>
+        <p:nvSpPr>
+          <p:cNvPr id="13" name="Rectangle 12"/>
           <p:cNvSpPr/>
           <p:nvPr/>
         </p:nvSpPr>
         <p:spPr>
           <a:xfrm>
-            <a:off x="4114800" y="2548682"/>
-            <a:ext cx="6062354" cy="143810"/>
+            <a:off x="4114800" y="2893660"/>
+            <a:ext cx="4067854" cy="143810"/>
+          </a:xfrm>
+          <a:prstGeom prst="rect">
+            <a:avLst/>
+          </a:prstGeom>
+          <a:solidFill>
+            <a:srgbClr val="C9A227"/>
+          </a:solidFill>
+          <a:ln>
+            <a:noFill/>
+          </a:ln>
+          <a:effectLst/>
+        </p:spPr>
+        <p:style>
+          <a:lnRef idx="1">
+            <a:schemeClr val="accent1"/>
+          </a:lnRef>
+          <a:fillRef idx="3">
+            <a:schemeClr val="accent1"/>
+          </a:fillRef>
+          <a:effectRef idx="2">
+            <a:schemeClr val="accent1"/>
+          </a:effectRef>
+          <a:fontRef idx="minor">
+            <a:schemeClr val="lt1"/>
+          </a:fontRef>
+        </p:style>
+        <p:txBody>
+          <a:bodyPr rtlCol="0" anchor="ctr"/>
+          <a:lstStyle/>
+          <a:p>
+            <a:pPr algn="ctr"/>
+          </a:p>
+        </p:txBody>
+      </p:sp>
+      <p:sp>
+        <p:nvSpPr>
+          <p:cNvPr id="14" name="TextBox 13"/>
+          <p:cNvSpPr txBox="1"/>
+          <p:nvPr/>
+        </p:nvSpPr>
+        <p:spPr>
+          <a:xfrm>
+            <a:off x="8274094" y="2811364"/>
+            <a:ext cx="2286000" cy="344978"/>
+          </a:xfrm>
+          <a:prstGeom prst="rect">
+            <a:avLst/>
+          </a:prstGeom>
+          <a:noFill/>
+        </p:spPr>
+        <p:txBody>
+          <a:bodyPr wrap="square" lIns="0" rIns="0" tIns="0" bIns="0">
+            <a:spAutoFit/>
+          </a:bodyPr>
+          <a:lstStyle/>
+          <a:p>
+            <a:r>
+              <a:rPr sz="900" b="0">
+                <a:solidFill>
+                  <a:srgbClr val="6B7082"/>
+                </a:solidFill>
+                <a:latin typeface="Helvetica Neue"/>
+              </a:rPr>
+              <a:t>45,534 views · 13 posts</a:t>
+            </a:r>
+          </a:p>
+        </p:txBody>
+      </p:sp>
+      <p:sp>
+        <p:nvSpPr>
+          <p:cNvPr id="15" name="TextBox 14"/>
+          <p:cNvSpPr txBox="1"/>
+          <p:nvPr/>
+        </p:nvSpPr>
+        <p:spPr>
+          <a:xfrm>
+            <a:off x="731520" y="3156342"/>
+            <a:ext cx="3200400" cy="344978"/>
+          </a:xfrm>
+          <a:prstGeom prst="rect">
+            <a:avLst/>
+          </a:prstGeom>
+          <a:noFill/>
+        </p:spPr>
+        <p:txBody>
+          <a:bodyPr wrap="square" lIns="0" rIns="0" tIns="0" bIns="0">
+            <a:spAutoFit/>
+          </a:bodyPr>
+          <a:lstStyle/>
+          <a:p>
+            <a:r>
+              <a:rPr sz="1100" b="1">
+                <a:solidFill>
+                  <a:srgbClr val="141833"/>
+                </a:solidFill>
+                <a:latin typeface="Helvetica Neue"/>
+              </a:rPr>
+              <a:t>Food &amp; Local Flavor</a:t>
+            </a:r>
+          </a:p>
+        </p:txBody>
+      </p:sp>
+      <p:sp>
+        <p:nvSpPr>
+          <p:cNvPr id="16" name="Rectangle 15"/>
+          <p:cNvSpPr/>
+          <p:nvPr/>
+        </p:nvSpPr>
+        <p:spPr>
+          <a:xfrm>
+            <a:off x="4114800" y="3238638"/>
+            <a:ext cx="3246672" cy="143810"/>
+          </a:xfrm>
+          <a:prstGeom prst="rect">
+            <a:avLst/>
+          </a:prstGeom>
+          <a:solidFill>
+            <a:srgbClr val="1B7A43"/>
+          </a:solidFill>
+          <a:ln>
+            <a:noFill/>
+          </a:ln>
+          <a:effectLst/>
+        </p:spPr>
+        <p:style>
+          <a:lnRef idx="1">
+            <a:schemeClr val="accent1"/>
+          </a:lnRef>
+          <a:fillRef idx="3">
+            <a:schemeClr val="accent1"/>
+          </a:fillRef>
+          <a:effectRef idx="2">
+            <a:schemeClr val="accent1"/>
+          </a:effectRef>
+          <a:fontRef idx="minor">
+            <a:schemeClr val="lt1"/>
+          </a:fontRef>
+        </p:style>
+        <p:txBody>
+          <a:bodyPr rtlCol="0" anchor="ctr"/>
+          <a:lstStyle/>
+          <a:p>
+            <a:pPr algn="ctr"/>
+          </a:p>
+        </p:txBody>
+      </p:sp>
+      <p:sp>
+        <p:nvSpPr>
+          <p:cNvPr id="17" name="TextBox 16"/>
+          <p:cNvSpPr txBox="1"/>
+          <p:nvPr/>
+        </p:nvSpPr>
+        <p:spPr>
+          <a:xfrm>
+            <a:off x="7452912" y="3156342"/>
+            <a:ext cx="2286000" cy="344978"/>
+          </a:xfrm>
+          <a:prstGeom prst="rect">
+            <a:avLst/>
+          </a:prstGeom>
+          <a:noFill/>
+        </p:spPr>
+        <p:txBody>
+          <a:bodyPr wrap="square" lIns="0" rIns="0" tIns="0" bIns="0">
+            <a:spAutoFit/>
+          </a:bodyPr>
+          <a:lstStyle/>
+          <a:p>
+            <a:r>
+              <a:rPr sz="900" b="0">
+                <a:solidFill>
+                  <a:srgbClr val="6B7082"/>
+                </a:solidFill>
+                <a:latin typeface="Helvetica Neue"/>
+              </a:rPr>
+              <a:t>36,342 views · 27 posts</a:t>
+            </a:r>
+          </a:p>
+        </p:txBody>
+      </p:sp>
+      <p:sp>
+        <p:nvSpPr>
+          <p:cNvPr id="18" name="TextBox 17"/>
+          <p:cNvSpPr txBox="1"/>
+          <p:nvPr/>
+        </p:nvSpPr>
+        <p:spPr>
+          <a:xfrm>
+            <a:off x="731520" y="3501320"/>
+            <a:ext cx="3200400" cy="344978"/>
+          </a:xfrm>
+          <a:prstGeom prst="rect">
+            <a:avLst/>
+          </a:prstGeom>
+          <a:noFill/>
+        </p:spPr>
+        <p:txBody>
+          <a:bodyPr wrap="square" lIns="0" rIns="0" tIns="0" bIns="0">
+            <a:spAutoFit/>
+          </a:bodyPr>
+          <a:lstStyle/>
+          <a:p>
+            <a:r>
+              <a:rPr sz="1100" b="1">
+                <a:solidFill>
+                  <a:srgbClr val="141833"/>
+                </a:solidFill>
+                <a:latin typeface="Helvetica Neue"/>
+              </a:rPr>
+              <a:t>Other / Uncategorized</a:t>
+            </a:r>
+          </a:p>
+        </p:txBody>
+      </p:sp>
+      <p:sp>
+        <p:nvSpPr>
+          <p:cNvPr id="19" name="Rectangle 18"/>
+          <p:cNvSpPr/>
+          <p:nvPr/>
+        </p:nvSpPr>
+        <p:spPr>
+          <a:xfrm>
+            <a:off x="4114800" y="3583616"/>
+            <a:ext cx="3210759" cy="143810"/>
+          </a:xfrm>
+          <a:prstGeom prst="rect">
+            <a:avLst/>
+          </a:prstGeom>
+          <a:solidFill>
+            <a:srgbClr val="6B7082"/>
+          </a:solidFill>
+          <a:ln>
+            <a:noFill/>
+          </a:ln>
+          <a:effectLst/>
+        </p:spPr>
+        <p:style>
+          <a:lnRef idx="1">
+            <a:schemeClr val="accent1"/>
+          </a:lnRef>
+          <a:fillRef idx="3">
+            <a:schemeClr val="accent1"/>
+          </a:fillRef>
+          <a:effectRef idx="2">
+            <a:schemeClr val="accent1"/>
+          </a:effectRef>
+          <a:fontRef idx="minor">
+            <a:schemeClr val="lt1"/>
+          </a:fontRef>
+        </p:style>
+        <p:txBody>
+          <a:bodyPr rtlCol="0" anchor="ctr"/>
+          <a:lstStyle/>
+          <a:p>
+            <a:pPr algn="ctr"/>
+          </a:p>
+        </p:txBody>
+      </p:sp>
+      <p:sp>
+        <p:nvSpPr>
+          <p:cNvPr id="20" name="TextBox 19"/>
+          <p:cNvSpPr txBox="1"/>
+          <p:nvPr/>
+        </p:nvSpPr>
+        <p:spPr>
+          <a:xfrm>
+            <a:off x="7416999" y="3501320"/>
+            <a:ext cx="2286000" cy="344978"/>
+          </a:xfrm>
+          <a:prstGeom prst="rect">
+            <a:avLst/>
+          </a:prstGeom>
+          <a:noFill/>
+        </p:spPr>
+        <p:txBody>
+          <a:bodyPr wrap="square" lIns="0" rIns="0" tIns="0" bIns="0">
+            <a:spAutoFit/>
+          </a:bodyPr>
+          <a:lstStyle/>
+          <a:p>
+            <a:r>
+              <a:rPr sz="900" b="0">
+                <a:solidFill>
+                  <a:srgbClr val="6B7082"/>
+                </a:solidFill>
+                <a:latin typeface="Helvetica Neue"/>
+              </a:rPr>
+              <a:t>35,940 views · 65 posts</a:t>
+            </a:r>
+          </a:p>
+        </p:txBody>
+      </p:sp>
+      <p:sp>
+        <p:nvSpPr>
+          <p:cNvPr id="21" name="TextBox 20"/>
+          <p:cNvSpPr txBox="1"/>
+          <p:nvPr/>
+        </p:nvSpPr>
+        <p:spPr>
+          <a:xfrm>
+            <a:off x="731520" y="3846298"/>
+            <a:ext cx="3200400" cy="344978"/>
+          </a:xfrm>
+          <a:prstGeom prst="rect">
+            <a:avLst/>
+          </a:prstGeom>
+          <a:noFill/>
+        </p:spPr>
+        <p:txBody>
+          <a:bodyPr wrap="square" lIns="0" rIns="0" tIns="0" bIns="0">
+            <a:spAutoFit/>
+          </a:bodyPr>
+          <a:lstStyle/>
+          <a:p>
+            <a:r>
+              <a:rPr sz="1100" b="1">
+                <a:solidFill>
+                  <a:srgbClr val="141833"/>
+                </a:solidFill>
+                <a:latin typeface="Helvetica Neue"/>
+              </a:rPr>
+              <a:t>Elections &amp; Judicial</a:t>
+            </a:r>
+          </a:p>
+        </p:txBody>
+      </p:sp>
+      <p:sp>
+        <p:nvSpPr>
+          <p:cNvPr id="22" name="Rectangle 21"/>
+          <p:cNvSpPr/>
+          <p:nvPr/>
+        </p:nvSpPr>
+        <p:spPr>
+          <a:xfrm>
+            <a:off x="4114800" y="3928594"/>
+            <a:ext cx="2307744" cy="143810"/>
+          </a:xfrm>
+          <a:prstGeom prst="rect">
+            <a:avLst/>
+          </a:prstGeom>
+          <a:solidFill>
+            <a:srgbClr val="2F3C7E"/>
+          </a:solidFill>
+          <a:ln>
+            <a:noFill/>
+          </a:ln>
+          <a:effectLst/>
+        </p:spPr>
+        <p:style>
+          <a:lnRef idx="1">
+            <a:schemeClr val="accent1"/>
+          </a:lnRef>
+          <a:fillRef idx="3">
+            <a:schemeClr val="accent1"/>
+          </a:fillRef>
+          <a:effectRef idx="2">
+            <a:schemeClr val="accent1"/>
+          </a:effectRef>
+          <a:fontRef idx="minor">
+            <a:schemeClr val="lt1"/>
+          </a:fontRef>
+        </p:style>
+        <p:txBody>
+          <a:bodyPr rtlCol="0" anchor="ctr"/>
+          <a:lstStyle/>
+          <a:p>
+            <a:pPr algn="ctr"/>
+          </a:p>
+        </p:txBody>
+      </p:sp>
+      <p:sp>
+        <p:nvSpPr>
+          <p:cNvPr id="23" name="TextBox 22"/>
+          <p:cNvSpPr txBox="1"/>
+          <p:nvPr/>
+        </p:nvSpPr>
+        <p:spPr>
+          <a:xfrm>
+            <a:off x="6513984" y="3846298"/>
+            <a:ext cx="2286000" cy="344978"/>
+          </a:xfrm>
+          <a:prstGeom prst="rect">
+            <a:avLst/>
+          </a:prstGeom>
+          <a:noFill/>
+        </p:spPr>
+        <p:txBody>
+          <a:bodyPr wrap="square" lIns="0" rIns="0" tIns="0" bIns="0">
+            <a:spAutoFit/>
+          </a:bodyPr>
+          <a:lstStyle/>
+          <a:p>
+            <a:r>
+              <a:rPr sz="900" b="0">
+                <a:solidFill>
+                  <a:srgbClr val="6B7082"/>
+                </a:solidFill>
+                <a:latin typeface="Helvetica Neue"/>
+              </a:rPr>
+              <a:t>25,832 views · 35 posts</a:t>
+            </a:r>
+          </a:p>
+        </p:txBody>
+      </p:sp>
+      <p:sp>
+        <p:nvSpPr>
+          <p:cNvPr id="24" name="TextBox 23"/>
+          <p:cNvSpPr txBox="1"/>
+          <p:nvPr/>
+        </p:nvSpPr>
+        <p:spPr>
+          <a:xfrm>
+            <a:off x="731520" y="4191277"/>
+            <a:ext cx="3200400" cy="344978"/>
+          </a:xfrm>
+          <a:prstGeom prst="rect">
+            <a:avLst/>
+          </a:prstGeom>
+          <a:noFill/>
+        </p:spPr>
+        <p:txBody>
+          <a:bodyPr wrap="square" lIns="0" rIns="0" tIns="0" bIns="0">
+            <a:spAutoFit/>
+          </a:bodyPr>
+          <a:lstStyle/>
+          <a:p>
+            <a:r>
+              <a:rPr sz="1100" b="1">
+                <a:solidFill>
+                  <a:srgbClr val="141833"/>
+                </a:solidFill>
+                <a:latin typeface="Helvetica Neue"/>
+              </a:rPr>
+              <a:t>Community &amp; Culture</a:t>
+            </a:r>
+          </a:p>
+        </p:txBody>
+      </p:sp>
+      <p:sp>
+        <p:nvSpPr>
+          <p:cNvPr id="25" name="Rectangle 24"/>
+          <p:cNvSpPr/>
+          <p:nvPr/>
+        </p:nvSpPr>
+        <p:spPr>
+          <a:xfrm>
+            <a:off x="4114800" y="4273573"/>
+            <a:ext cx="2240116" cy="143810"/>
+          </a:xfrm>
+          <a:prstGeom prst="rect">
+            <a:avLst/>
+          </a:prstGeom>
+          <a:solidFill>
+            <a:srgbClr val="141833"/>
+          </a:solidFill>
+          <a:ln>
+            <a:noFill/>
+          </a:ln>
+          <a:effectLst/>
+        </p:spPr>
+        <p:style>
+          <a:lnRef idx="1">
+            <a:schemeClr val="accent1"/>
+          </a:lnRef>
+          <a:fillRef idx="3">
+            <a:schemeClr val="accent1"/>
+          </a:fillRef>
+          <a:effectRef idx="2">
+            <a:schemeClr val="accent1"/>
+          </a:effectRef>
+          <a:fontRef idx="minor">
+            <a:schemeClr val="lt1"/>
+          </a:fontRef>
+        </p:style>
+        <p:txBody>
+          <a:bodyPr rtlCol="0" anchor="ctr"/>
+          <a:lstStyle/>
+          <a:p>
+            <a:pPr algn="ctr"/>
+          </a:p>
+        </p:txBody>
+      </p:sp>
+      <p:sp>
+        <p:nvSpPr>
+          <p:cNvPr id="26" name="TextBox 25"/>
+          <p:cNvSpPr txBox="1"/>
+          <p:nvPr/>
+        </p:nvSpPr>
+        <p:spPr>
+          <a:xfrm>
+            <a:off x="6446356" y="4191277"/>
+            <a:ext cx="2286000" cy="344978"/>
+          </a:xfrm>
+          <a:prstGeom prst="rect">
+            <a:avLst/>
+          </a:prstGeom>
+          <a:noFill/>
+        </p:spPr>
+        <p:txBody>
+          <a:bodyPr wrap="square" lIns="0" rIns="0" tIns="0" bIns="0">
+            <a:spAutoFit/>
+          </a:bodyPr>
+          <a:lstStyle/>
+          <a:p>
+            <a:r>
+              <a:rPr sz="900" b="0">
+                <a:solidFill>
+                  <a:srgbClr val="6B7082"/>
+                </a:solidFill>
+                <a:latin typeface="Helvetica Neue"/>
+              </a:rPr>
+              <a:t>25,075 views · 36 posts</a:t>
+            </a:r>
+          </a:p>
+        </p:txBody>
+      </p:sp>
+      <p:sp>
+        <p:nvSpPr>
+          <p:cNvPr id="27" name="TextBox 26"/>
+          <p:cNvSpPr txBox="1"/>
+          <p:nvPr/>
+        </p:nvSpPr>
+        <p:spPr>
+          <a:xfrm>
+            <a:off x="731520" y="4536255"/>
+            <a:ext cx="3200400" cy="344978"/>
+          </a:xfrm>
+          <a:prstGeom prst="rect">
+            <a:avLst/>
+          </a:prstGeom>
+          <a:noFill/>
+        </p:spPr>
+        <p:txBody>
+          <a:bodyPr wrap="square" lIns="0" rIns="0" tIns="0" bIns="0">
+            <a:spAutoFit/>
+          </a:bodyPr>
+          <a:lstStyle/>
+          <a:p>
+            <a:r>
+              <a:rPr sz="1100" b="1">
+                <a:solidFill>
+                  <a:srgbClr val="141833"/>
+                </a:solidFill>
+                <a:latin typeface="Helvetica Neue"/>
+              </a:rPr>
+              <a:t>Resident Highlights</a:t>
+            </a:r>
+          </a:p>
+        </p:txBody>
+      </p:sp>
+      <p:sp>
+        <p:nvSpPr>
+          <p:cNvPr id="28" name="Rectangle 27"/>
+          <p:cNvSpPr/>
+          <p:nvPr/>
+        </p:nvSpPr>
+        <p:spPr>
+          <a:xfrm>
+            <a:off x="4114800" y="4618551"/>
+            <a:ext cx="652336" cy="143810"/>
+          </a:xfrm>
+          <a:prstGeom prst="rect">
+            <a:avLst/>
+          </a:prstGeom>
+          <a:solidFill>
+            <a:srgbClr val="1B7A43"/>
+          </a:solidFill>
+          <a:ln>
+            <a:noFill/>
+          </a:ln>
+          <a:effectLst/>
+        </p:spPr>
+        <p:style>
+          <a:lnRef idx="1">
+            <a:schemeClr val="accent1"/>
+          </a:lnRef>
+          <a:fillRef idx="3">
+            <a:schemeClr val="accent1"/>
+          </a:fillRef>
+          <a:effectRef idx="2">
+            <a:schemeClr val="accent1"/>
+          </a:effectRef>
+          <a:fontRef idx="minor">
+            <a:schemeClr val="lt1"/>
+          </a:fontRef>
+        </p:style>
+        <p:txBody>
+          <a:bodyPr rtlCol="0" anchor="ctr"/>
+          <a:lstStyle/>
+          <a:p>
+            <a:pPr algn="ctr"/>
+          </a:p>
+        </p:txBody>
+      </p:sp>
+      <p:sp>
+        <p:nvSpPr>
+          <p:cNvPr id="29" name="TextBox 28"/>
+          <p:cNvSpPr txBox="1"/>
+          <p:nvPr/>
+        </p:nvSpPr>
+        <p:spPr>
+          <a:xfrm>
+            <a:off x="4858576" y="4536255"/>
+            <a:ext cx="2286000" cy="344978"/>
+          </a:xfrm>
+          <a:prstGeom prst="rect">
+            <a:avLst/>
+          </a:prstGeom>
+          <a:noFill/>
+        </p:spPr>
+        <p:txBody>
+          <a:bodyPr wrap="square" lIns="0" rIns="0" tIns="0" bIns="0">
+            <a:spAutoFit/>
+          </a:bodyPr>
+          <a:lstStyle/>
+          <a:p>
+            <a:r>
+              <a:rPr sz="900" b="0">
+                <a:solidFill>
+                  <a:srgbClr val="6B7082"/>
+                </a:solidFill>
+                <a:latin typeface="Helvetica Neue"/>
+              </a:rPr>
+              <a:t>7,302 views · 6 posts</a:t>
+            </a:r>
+          </a:p>
+        </p:txBody>
+      </p:sp>
+      <p:sp>
+        <p:nvSpPr>
+          <p:cNvPr id="30" name="TextBox 29"/>
+          <p:cNvSpPr txBox="1"/>
+          <p:nvPr/>
+        </p:nvSpPr>
+        <p:spPr>
+          <a:xfrm>
+            <a:off x="731520" y="4881233"/>
+            <a:ext cx="3200400" cy="344978"/>
+          </a:xfrm>
+          <a:prstGeom prst="rect">
+            <a:avLst/>
+          </a:prstGeom>
+          <a:noFill/>
+        </p:spPr>
+        <p:txBody>
+          <a:bodyPr wrap="square" lIns="0" rIns="0" tIns="0" bIns="0">
+            <a:spAutoFit/>
+          </a:bodyPr>
+          <a:lstStyle/>
+          <a:p>
+            <a:r>
+              <a:rPr sz="1100" b="1">
+                <a:solidFill>
+                  <a:srgbClr val="141833"/>
+                </a:solidFill>
+                <a:latin typeface="Helvetica Neue"/>
+              </a:rPr>
+              <a:t>American Pride</a:t>
+            </a:r>
+          </a:p>
+        </p:txBody>
+      </p:sp>
+      <p:sp>
+        <p:nvSpPr>
+          <p:cNvPr id="31" name="Rectangle 30"/>
+          <p:cNvSpPr/>
+          <p:nvPr/>
+        </p:nvSpPr>
+        <p:spPr>
+          <a:xfrm>
+            <a:off x="4114800" y="4963529"/>
+            <a:ext cx="378698" cy="143810"/>
           </a:xfrm>
           <a:prstGeom prst="rect">
             <a:avLst/>
@@ -10796,13 +11580,13 @@
       </p:sp>
       <p:sp>
         <p:nvSpPr>
-          <p:cNvPr id="11" name="TextBox 10"/>
-          <p:cNvSpPr txBox="1"/>
-          <p:nvPr/>
-        </p:nvSpPr>
-        <p:spPr>
-          <a:xfrm>
-            <a:off x="10268594" y="2466386"/>
+          <p:cNvPr id="32" name="TextBox 31"/>
+          <p:cNvSpPr txBox="1"/>
+          <p:nvPr/>
+        </p:nvSpPr>
+        <p:spPr>
+          <a:xfrm>
+            <a:off x="4584938" y="4881233"/>
             <a:ext cx="2286000" cy="344978"/>
           </a:xfrm>
           <a:prstGeom prst="rect">
@@ -10823,20 +11607,20 @@
                 </a:solidFill>
                 <a:latin typeface="Helvetica Neue"/>
               </a:rPr>
-              <a:t>69,600 views · 27 posts</a:t>
-            </a:r>
-          </a:p>
-        </p:txBody>
-      </p:sp>
-      <p:sp>
-        <p:nvSpPr>
-          <p:cNvPr id="12" name="TextBox 11"/>
-          <p:cNvSpPr txBox="1"/>
-          <p:nvPr/>
-        </p:nvSpPr>
-        <p:spPr>
-          <a:xfrm>
-            <a:off x="731520" y="2811364"/>
+              <a:t>4,239 views · 7 posts</a:t>
+            </a:r>
+          </a:p>
+        </p:txBody>
+      </p:sp>
+      <p:sp>
+        <p:nvSpPr>
+          <p:cNvPr id="33" name="TextBox 32"/>
+          <p:cNvSpPr txBox="1"/>
+          <p:nvPr/>
+        </p:nvSpPr>
+        <p:spPr>
+          <a:xfrm>
+            <a:off x="731520" y="5226211"/>
             <a:ext cx="3200400" cy="344978"/>
           </a:xfrm>
           <a:prstGeom prst="rect">
@@ -10857,693 +11641,21 @@
                 </a:solidFill>
                 <a:latin typeface="Helvetica Neue"/>
               </a:rPr>
-              <a:t>Downtown Development</a:t>
-            </a:r>
-          </a:p>
-        </p:txBody>
-      </p:sp>
-      <p:sp>
-        <p:nvSpPr>
-          <p:cNvPr id="13" name="Rectangle 12"/>
+              <a:t>Political Individual Highlights</a:t>
+            </a:r>
+          </a:p>
+        </p:txBody>
+      </p:sp>
+      <p:sp>
+        <p:nvSpPr>
+          <p:cNvPr id="34" name="Rectangle 33"/>
           <p:cNvSpPr/>
           <p:nvPr/>
         </p:nvSpPr>
         <p:spPr>
           <a:xfrm>
-            <a:off x="4114800" y="2893660"/>
-            <a:ext cx="4036691" cy="143810"/>
-          </a:xfrm>
-          <a:prstGeom prst="rect">
-            <a:avLst/>
-          </a:prstGeom>
-          <a:solidFill>
-            <a:srgbClr val="C9A227"/>
-          </a:solidFill>
-          <a:ln>
-            <a:noFill/>
-          </a:ln>
-          <a:effectLst/>
-        </p:spPr>
-        <p:style>
-          <a:lnRef idx="1">
-            <a:schemeClr val="accent1"/>
-          </a:lnRef>
-          <a:fillRef idx="3">
-            <a:schemeClr val="accent1"/>
-          </a:fillRef>
-          <a:effectRef idx="2">
-            <a:schemeClr val="accent1"/>
-          </a:effectRef>
-          <a:fontRef idx="minor">
-            <a:schemeClr val="lt1"/>
-          </a:fontRef>
-        </p:style>
-        <p:txBody>
-          <a:bodyPr rtlCol="0" anchor="ctr"/>
-          <a:lstStyle/>
-          <a:p>
-            <a:pPr algn="ctr"/>
-          </a:p>
-        </p:txBody>
-      </p:sp>
-      <p:sp>
-        <p:nvSpPr>
-          <p:cNvPr id="14" name="TextBox 13"/>
-          <p:cNvSpPr txBox="1"/>
-          <p:nvPr/>
-        </p:nvSpPr>
-        <p:spPr>
-          <a:xfrm>
-            <a:off x="8242931" y="2811364"/>
-            <a:ext cx="2286000" cy="344978"/>
-          </a:xfrm>
-          <a:prstGeom prst="rect">
-            <a:avLst/>
-          </a:prstGeom>
-          <a:noFill/>
-        </p:spPr>
-        <p:txBody>
-          <a:bodyPr wrap="square" lIns="0" rIns="0" tIns="0" bIns="0">
-            <a:spAutoFit/>
-          </a:bodyPr>
-          <a:lstStyle/>
-          <a:p>
-            <a:r>
-              <a:rPr sz="900" b="0">
-                <a:solidFill>
-                  <a:srgbClr val="6B7082"/>
-                </a:solidFill>
-                <a:latin typeface="Helvetica Neue"/>
-              </a:rPr>
-              <a:t>46,344 views · 13 posts</a:t>
-            </a:r>
-          </a:p>
-        </p:txBody>
-      </p:sp>
-      <p:sp>
-        <p:nvSpPr>
-          <p:cNvPr id="15" name="TextBox 14"/>
-          <p:cNvSpPr txBox="1"/>
-          <p:nvPr/>
-        </p:nvSpPr>
-        <p:spPr>
-          <a:xfrm>
-            <a:off x="731520" y="3156342"/>
-            <a:ext cx="3200400" cy="344978"/>
-          </a:xfrm>
-          <a:prstGeom prst="rect">
-            <a:avLst/>
-          </a:prstGeom>
-          <a:noFill/>
-        </p:spPr>
-        <p:txBody>
-          <a:bodyPr wrap="square" lIns="0" rIns="0" tIns="0" bIns="0">
-            <a:spAutoFit/>
-          </a:bodyPr>
-          <a:lstStyle/>
-          <a:p>
-            <a:r>
-              <a:rPr sz="1100" b="1">
-                <a:solidFill>
-                  <a:srgbClr val="141833"/>
-                </a:solidFill>
-                <a:latin typeface="Helvetica Neue"/>
-              </a:rPr>
-              <a:t>Other / Uncategorized</a:t>
-            </a:r>
-          </a:p>
-        </p:txBody>
-      </p:sp>
-      <p:sp>
-        <p:nvSpPr>
-          <p:cNvPr id="16" name="Rectangle 15"/>
-          <p:cNvSpPr/>
-          <p:nvPr/>
-        </p:nvSpPr>
-        <p:spPr>
-          <a:xfrm>
-            <a:off x="4114800" y="3238638"/>
-            <a:ext cx="3473833" cy="143810"/>
-          </a:xfrm>
-          <a:prstGeom prst="rect">
-            <a:avLst/>
-          </a:prstGeom>
-          <a:solidFill>
-            <a:srgbClr val="6B7082"/>
-          </a:solidFill>
-          <a:ln>
-            <a:noFill/>
-          </a:ln>
-          <a:effectLst/>
-        </p:spPr>
-        <p:style>
-          <a:lnRef idx="1">
-            <a:schemeClr val="accent1"/>
-          </a:lnRef>
-          <a:fillRef idx="3">
-            <a:schemeClr val="accent1"/>
-          </a:fillRef>
-          <a:effectRef idx="2">
-            <a:schemeClr val="accent1"/>
-          </a:effectRef>
-          <a:fontRef idx="minor">
-            <a:schemeClr val="lt1"/>
-          </a:fontRef>
-        </p:style>
-        <p:txBody>
-          <a:bodyPr rtlCol="0" anchor="ctr"/>
-          <a:lstStyle/>
-          <a:p>
-            <a:pPr algn="ctr"/>
-          </a:p>
-        </p:txBody>
-      </p:sp>
-      <p:sp>
-        <p:nvSpPr>
-          <p:cNvPr id="17" name="TextBox 16"/>
-          <p:cNvSpPr txBox="1"/>
-          <p:nvPr/>
-        </p:nvSpPr>
-        <p:spPr>
-          <a:xfrm>
-            <a:off x="7680073" y="3156342"/>
-            <a:ext cx="2286000" cy="344978"/>
-          </a:xfrm>
-          <a:prstGeom prst="rect">
-            <a:avLst/>
-          </a:prstGeom>
-          <a:noFill/>
-        </p:spPr>
-        <p:txBody>
-          <a:bodyPr wrap="square" lIns="0" rIns="0" tIns="0" bIns="0">
-            <a:spAutoFit/>
-          </a:bodyPr>
-          <a:lstStyle/>
-          <a:p>
-            <a:r>
-              <a:rPr sz="900" b="0">
-                <a:solidFill>
-                  <a:srgbClr val="6B7082"/>
-                </a:solidFill>
-                <a:latin typeface="Helvetica Neue"/>
-              </a:rPr>
-              <a:t>39,882 views · 56 posts</a:t>
-            </a:r>
-          </a:p>
-        </p:txBody>
-      </p:sp>
-      <p:sp>
-        <p:nvSpPr>
-          <p:cNvPr id="18" name="TextBox 17"/>
-          <p:cNvSpPr txBox="1"/>
-          <p:nvPr/>
-        </p:nvSpPr>
-        <p:spPr>
-          <a:xfrm>
-            <a:off x="731520" y="3501320"/>
-            <a:ext cx="3200400" cy="344978"/>
-          </a:xfrm>
-          <a:prstGeom prst="rect">
-            <a:avLst/>
-          </a:prstGeom>
-          <a:noFill/>
-        </p:spPr>
-        <p:txBody>
-          <a:bodyPr wrap="square" lIns="0" rIns="0" tIns="0" bIns="0">
-            <a:spAutoFit/>
-          </a:bodyPr>
-          <a:lstStyle/>
-          <a:p>
-            <a:r>
-              <a:rPr sz="1100" b="1">
-                <a:solidFill>
-                  <a:srgbClr val="141833"/>
-                </a:solidFill>
-                <a:latin typeface="Helvetica Neue"/>
-              </a:rPr>
-              <a:t>Food &amp; Local Flavor</a:t>
-            </a:r>
-          </a:p>
-        </p:txBody>
-      </p:sp>
-      <p:sp>
-        <p:nvSpPr>
-          <p:cNvPr id="19" name="Rectangle 18"/>
-          <p:cNvSpPr/>
-          <p:nvPr/>
-        </p:nvSpPr>
-        <p:spPr>
-          <a:xfrm>
-            <a:off x="4114800" y="3583616"/>
-            <a:ext cx="3225068" cy="143810"/>
-          </a:xfrm>
-          <a:prstGeom prst="rect">
-            <a:avLst/>
-          </a:prstGeom>
-          <a:solidFill>
-            <a:srgbClr val="1B7A43"/>
-          </a:solidFill>
-          <a:ln>
-            <a:noFill/>
-          </a:ln>
-          <a:effectLst/>
-        </p:spPr>
-        <p:style>
-          <a:lnRef idx="1">
-            <a:schemeClr val="accent1"/>
-          </a:lnRef>
-          <a:fillRef idx="3">
-            <a:schemeClr val="accent1"/>
-          </a:fillRef>
-          <a:effectRef idx="2">
-            <a:schemeClr val="accent1"/>
-          </a:effectRef>
-          <a:fontRef idx="minor">
-            <a:schemeClr val="lt1"/>
-          </a:fontRef>
-        </p:style>
-        <p:txBody>
-          <a:bodyPr rtlCol="0" anchor="ctr"/>
-          <a:lstStyle/>
-          <a:p>
-            <a:pPr algn="ctr"/>
-          </a:p>
-        </p:txBody>
-      </p:sp>
-      <p:sp>
-        <p:nvSpPr>
-          <p:cNvPr id="20" name="TextBox 19"/>
-          <p:cNvSpPr txBox="1"/>
-          <p:nvPr/>
-        </p:nvSpPr>
-        <p:spPr>
-          <a:xfrm>
-            <a:off x="7431308" y="3501320"/>
-            <a:ext cx="2286000" cy="344978"/>
-          </a:xfrm>
-          <a:prstGeom prst="rect">
-            <a:avLst/>
-          </a:prstGeom>
-          <a:noFill/>
-        </p:spPr>
-        <p:txBody>
-          <a:bodyPr wrap="square" lIns="0" rIns="0" tIns="0" bIns="0">
-            <a:spAutoFit/>
-          </a:bodyPr>
-          <a:lstStyle/>
-          <a:p>
-            <a:r>
-              <a:rPr sz="900" b="0">
-                <a:solidFill>
-                  <a:srgbClr val="6B7082"/>
-                </a:solidFill>
-                <a:latin typeface="Helvetica Neue"/>
-              </a:rPr>
-              <a:t>37,026 views · 27 posts</a:t>
-            </a:r>
-          </a:p>
-        </p:txBody>
-      </p:sp>
-      <p:sp>
-        <p:nvSpPr>
-          <p:cNvPr id="21" name="TextBox 20"/>
-          <p:cNvSpPr txBox="1"/>
-          <p:nvPr/>
-        </p:nvSpPr>
-        <p:spPr>
-          <a:xfrm>
-            <a:off x="731520" y="3846298"/>
-            <a:ext cx="3200400" cy="344978"/>
-          </a:xfrm>
-          <a:prstGeom prst="rect">
-            <a:avLst/>
-          </a:prstGeom>
-          <a:noFill/>
-        </p:spPr>
-        <p:txBody>
-          <a:bodyPr wrap="square" lIns="0" rIns="0" tIns="0" bIns="0">
-            <a:spAutoFit/>
-          </a:bodyPr>
-          <a:lstStyle/>
-          <a:p>
-            <a:r>
-              <a:rPr sz="1100" b="1">
-                <a:solidFill>
-                  <a:srgbClr val="141833"/>
-                </a:solidFill>
-                <a:latin typeface="Helvetica Neue"/>
-              </a:rPr>
-              <a:t>Elections &amp; Judicial</a:t>
-            </a:r>
-          </a:p>
-        </p:txBody>
-      </p:sp>
-      <p:sp>
-        <p:nvSpPr>
-          <p:cNvPr id="22" name="Rectangle 21"/>
-          <p:cNvSpPr/>
-          <p:nvPr/>
-        </p:nvSpPr>
-        <p:spPr>
-          <a:xfrm>
-            <a:off x="4114800" y="3928594"/>
-            <a:ext cx="2441317" cy="143810"/>
-          </a:xfrm>
-          <a:prstGeom prst="rect">
-            <a:avLst/>
-          </a:prstGeom>
-          <a:solidFill>
-            <a:srgbClr val="2F3C7E"/>
-          </a:solidFill>
-          <a:ln>
-            <a:noFill/>
-          </a:ln>
-          <a:effectLst/>
-        </p:spPr>
-        <p:style>
-          <a:lnRef idx="1">
-            <a:schemeClr val="accent1"/>
-          </a:lnRef>
-          <a:fillRef idx="3">
-            <a:schemeClr val="accent1"/>
-          </a:fillRef>
-          <a:effectRef idx="2">
-            <a:schemeClr val="accent1"/>
-          </a:effectRef>
-          <a:fontRef idx="minor">
-            <a:schemeClr val="lt1"/>
-          </a:fontRef>
-        </p:style>
-        <p:txBody>
-          <a:bodyPr rtlCol="0" anchor="ctr"/>
-          <a:lstStyle/>
-          <a:p>
-            <a:pPr algn="ctr"/>
-          </a:p>
-        </p:txBody>
-      </p:sp>
-      <p:sp>
-        <p:nvSpPr>
-          <p:cNvPr id="23" name="TextBox 22"/>
-          <p:cNvSpPr txBox="1"/>
-          <p:nvPr/>
-        </p:nvSpPr>
-        <p:spPr>
-          <a:xfrm>
-            <a:off x="6647557" y="3846298"/>
-            <a:ext cx="2286000" cy="344978"/>
-          </a:xfrm>
-          <a:prstGeom prst="rect">
-            <a:avLst/>
-          </a:prstGeom>
-          <a:noFill/>
-        </p:spPr>
-        <p:txBody>
-          <a:bodyPr wrap="square" lIns="0" rIns="0" tIns="0" bIns="0">
-            <a:spAutoFit/>
-          </a:bodyPr>
-          <a:lstStyle/>
-          <a:p>
-            <a:r>
-              <a:rPr sz="900" b="0">
-                <a:solidFill>
-                  <a:srgbClr val="6B7082"/>
-                </a:solidFill>
-                <a:latin typeface="Helvetica Neue"/>
-              </a:rPr>
-              <a:t>28,028 views · 35 posts</a:t>
-            </a:r>
-          </a:p>
-        </p:txBody>
-      </p:sp>
-      <p:sp>
-        <p:nvSpPr>
-          <p:cNvPr id="24" name="TextBox 23"/>
-          <p:cNvSpPr txBox="1"/>
-          <p:nvPr/>
-        </p:nvSpPr>
-        <p:spPr>
-          <a:xfrm>
-            <a:off x="731520" y="4191277"/>
-            <a:ext cx="3200400" cy="344978"/>
-          </a:xfrm>
-          <a:prstGeom prst="rect">
-            <a:avLst/>
-          </a:prstGeom>
-          <a:noFill/>
-        </p:spPr>
-        <p:txBody>
-          <a:bodyPr wrap="square" lIns="0" rIns="0" tIns="0" bIns="0">
-            <a:spAutoFit/>
-          </a:bodyPr>
-          <a:lstStyle/>
-          <a:p>
-            <a:r>
-              <a:rPr sz="1100" b="1">
-                <a:solidFill>
-                  <a:srgbClr val="141833"/>
-                </a:solidFill>
-                <a:latin typeface="Helvetica Neue"/>
-              </a:rPr>
-              <a:t>Community &amp; Culture</a:t>
-            </a:r>
-          </a:p>
-        </p:txBody>
-      </p:sp>
-      <p:sp>
-        <p:nvSpPr>
-          <p:cNvPr id="25" name="Rectangle 24"/>
-          <p:cNvSpPr/>
-          <p:nvPr/>
-        </p:nvSpPr>
-        <p:spPr>
-          <a:xfrm>
-            <a:off x="4114800" y="4273573"/>
-            <a:ext cx="2087679" cy="143810"/>
-          </a:xfrm>
-          <a:prstGeom prst="rect">
-            <a:avLst/>
-          </a:prstGeom>
-          <a:solidFill>
-            <a:srgbClr val="141833"/>
-          </a:solidFill>
-          <a:ln>
-            <a:noFill/>
-          </a:ln>
-          <a:effectLst/>
-        </p:spPr>
-        <p:style>
-          <a:lnRef idx="1">
-            <a:schemeClr val="accent1"/>
-          </a:lnRef>
-          <a:fillRef idx="3">
-            <a:schemeClr val="accent1"/>
-          </a:fillRef>
-          <a:effectRef idx="2">
-            <a:schemeClr val="accent1"/>
-          </a:effectRef>
-          <a:fontRef idx="minor">
-            <a:schemeClr val="lt1"/>
-          </a:fontRef>
-        </p:style>
-        <p:txBody>
-          <a:bodyPr rtlCol="0" anchor="ctr"/>
-          <a:lstStyle/>
-          <a:p>
-            <a:pPr algn="ctr"/>
-          </a:p>
-        </p:txBody>
-      </p:sp>
-      <p:sp>
-        <p:nvSpPr>
-          <p:cNvPr id="26" name="TextBox 25"/>
-          <p:cNvSpPr txBox="1"/>
-          <p:nvPr/>
-        </p:nvSpPr>
-        <p:spPr>
-          <a:xfrm>
-            <a:off x="6293919" y="4191277"/>
-            <a:ext cx="2286000" cy="344978"/>
-          </a:xfrm>
-          <a:prstGeom prst="rect">
-            <a:avLst/>
-          </a:prstGeom>
-          <a:noFill/>
-        </p:spPr>
-        <p:txBody>
-          <a:bodyPr wrap="square" lIns="0" rIns="0" tIns="0" bIns="0">
-            <a:spAutoFit/>
-          </a:bodyPr>
-          <a:lstStyle/>
-          <a:p>
-            <a:r>
-              <a:rPr sz="900" b="0">
-                <a:solidFill>
-                  <a:srgbClr val="6B7082"/>
-                </a:solidFill>
-                <a:latin typeface="Helvetica Neue"/>
-              </a:rPr>
-              <a:t>23,968 views · 31 posts</a:t>
-            </a:r>
-          </a:p>
-        </p:txBody>
-      </p:sp>
-      <p:sp>
-        <p:nvSpPr>
-          <p:cNvPr id="27" name="TextBox 26"/>
-          <p:cNvSpPr txBox="1"/>
-          <p:nvPr/>
-        </p:nvSpPr>
-        <p:spPr>
-          <a:xfrm>
-            <a:off x="731520" y="4536255"/>
-            <a:ext cx="3200400" cy="344978"/>
-          </a:xfrm>
-          <a:prstGeom prst="rect">
-            <a:avLst/>
-          </a:prstGeom>
-          <a:noFill/>
-        </p:spPr>
-        <p:txBody>
-          <a:bodyPr wrap="square" lIns="0" rIns="0" tIns="0" bIns="0">
-            <a:spAutoFit/>
-          </a:bodyPr>
-          <a:lstStyle/>
-          <a:p>
-            <a:r>
-              <a:rPr sz="1100" b="1">
-                <a:solidFill>
-                  <a:srgbClr val="141833"/>
-                </a:solidFill>
-                <a:latin typeface="Helvetica Neue"/>
-              </a:rPr>
-              <a:t>Resident Highlights</a:t>
-            </a:r>
-          </a:p>
-        </p:txBody>
-      </p:sp>
-      <p:sp>
-        <p:nvSpPr>
-          <p:cNvPr id="28" name="Rectangle 27"/>
-          <p:cNvSpPr/>
-          <p:nvPr/>
-        </p:nvSpPr>
-        <p:spPr>
-          <a:xfrm>
-            <a:off x="4114800" y="4618551"/>
-            <a:ext cx="705793" cy="143810"/>
-          </a:xfrm>
-          <a:prstGeom prst="rect">
-            <a:avLst/>
-          </a:prstGeom>
-          <a:solidFill>
-            <a:srgbClr val="1B7A43"/>
-          </a:solidFill>
-          <a:ln>
-            <a:noFill/>
-          </a:ln>
-          <a:effectLst/>
-        </p:spPr>
-        <p:style>
-          <a:lnRef idx="1">
-            <a:schemeClr val="accent1"/>
-          </a:lnRef>
-          <a:fillRef idx="3">
-            <a:schemeClr val="accent1"/>
-          </a:fillRef>
-          <a:effectRef idx="2">
-            <a:schemeClr val="accent1"/>
-          </a:effectRef>
-          <a:fontRef idx="minor">
-            <a:schemeClr val="lt1"/>
-          </a:fontRef>
-        </p:style>
-        <p:txBody>
-          <a:bodyPr rtlCol="0" anchor="ctr"/>
-          <a:lstStyle/>
-          <a:p>
-            <a:pPr algn="ctr"/>
-          </a:p>
-        </p:txBody>
-      </p:sp>
-      <p:sp>
-        <p:nvSpPr>
-          <p:cNvPr id="29" name="TextBox 28"/>
-          <p:cNvSpPr txBox="1"/>
-          <p:nvPr/>
-        </p:nvSpPr>
-        <p:spPr>
-          <a:xfrm>
-            <a:off x="4912033" y="4536255"/>
-            <a:ext cx="2286000" cy="344978"/>
-          </a:xfrm>
-          <a:prstGeom prst="rect">
-            <a:avLst/>
-          </a:prstGeom>
-          <a:noFill/>
-        </p:spPr>
-        <p:txBody>
-          <a:bodyPr wrap="square" lIns="0" rIns="0" tIns="0" bIns="0">
-            <a:spAutoFit/>
-          </a:bodyPr>
-          <a:lstStyle/>
-          <a:p>
-            <a:r>
-              <a:rPr sz="900" b="0">
-                <a:solidFill>
-                  <a:srgbClr val="6B7082"/>
-                </a:solidFill>
-                <a:latin typeface="Helvetica Neue"/>
-              </a:rPr>
-              <a:t>8,103 views · 6 posts</a:t>
-            </a:r>
-          </a:p>
-        </p:txBody>
-      </p:sp>
-      <p:sp>
-        <p:nvSpPr>
-          <p:cNvPr id="30" name="TextBox 29"/>
-          <p:cNvSpPr txBox="1"/>
-          <p:nvPr/>
-        </p:nvSpPr>
-        <p:spPr>
-          <a:xfrm>
-            <a:off x="731520" y="4881233"/>
-            <a:ext cx="3200400" cy="344978"/>
-          </a:xfrm>
-          <a:prstGeom prst="rect">
-            <a:avLst/>
-          </a:prstGeom>
-          <a:noFill/>
-        </p:spPr>
-        <p:txBody>
-          <a:bodyPr wrap="square" lIns="0" rIns="0" tIns="0" bIns="0">
-            <a:spAutoFit/>
-          </a:bodyPr>
-          <a:lstStyle/>
-          <a:p>
-            <a:r>
-              <a:rPr sz="1100" b="1">
-                <a:solidFill>
-                  <a:srgbClr val="141833"/>
-                </a:solidFill>
-                <a:latin typeface="Helvetica Neue"/>
-              </a:rPr>
-              <a:t>Political Individual Highlights</a:t>
-            </a:r>
-          </a:p>
-        </p:txBody>
-      </p:sp>
-      <p:sp>
-        <p:nvSpPr>
-          <p:cNvPr id="31" name="Rectangle 30"/>
-          <p:cNvSpPr/>
-          <p:nvPr/>
-        </p:nvSpPr>
-        <p:spPr>
-          <a:xfrm>
-            <a:off x="4114800" y="4963529"/>
-            <a:ext cx="352243" cy="143810"/>
+            <a:off x="4114800" y="5308507"/>
+            <a:ext cx="361277" cy="143810"/>
           </a:xfrm>
           <a:prstGeom prst="rect">
             <a:avLst/>
@@ -11580,13 +11692,13 @@
       </p:sp>
       <p:sp>
         <p:nvSpPr>
-          <p:cNvPr id="32" name="TextBox 31"/>
-          <p:cNvSpPr txBox="1"/>
-          <p:nvPr/>
-        </p:nvSpPr>
-        <p:spPr>
-          <a:xfrm>
-            <a:off x="4558483" y="4881233"/>
+          <p:cNvPr id="35" name="TextBox 34"/>
+          <p:cNvSpPr txBox="1"/>
+          <p:nvPr/>
+        </p:nvSpPr>
+        <p:spPr>
+          <a:xfrm>
+            <a:off x="4567517" y="5226211"/>
             <a:ext cx="2286000" cy="344978"/>
           </a:xfrm>
           <a:prstGeom prst="rect">
@@ -11608,118 +11720,6 @@
                 <a:latin typeface="Helvetica Neue"/>
               </a:rPr>
               <a:t>4,044 views · 7 posts</a:t>
-            </a:r>
-          </a:p>
-        </p:txBody>
-      </p:sp>
-      <p:sp>
-        <p:nvSpPr>
-          <p:cNvPr id="33" name="TextBox 32"/>
-          <p:cNvSpPr txBox="1"/>
-          <p:nvPr/>
-        </p:nvSpPr>
-        <p:spPr>
-          <a:xfrm>
-            <a:off x="731520" y="5226211"/>
-            <a:ext cx="3200400" cy="344978"/>
-          </a:xfrm>
-          <a:prstGeom prst="rect">
-            <a:avLst/>
-          </a:prstGeom>
-          <a:noFill/>
-        </p:spPr>
-        <p:txBody>
-          <a:bodyPr wrap="square" lIns="0" rIns="0" tIns="0" bIns="0">
-            <a:spAutoFit/>
-          </a:bodyPr>
-          <a:lstStyle/>
-          <a:p>
-            <a:r>
-              <a:rPr sz="1100" b="1">
-                <a:solidFill>
-                  <a:srgbClr val="141833"/>
-                </a:solidFill>
-                <a:latin typeface="Helvetica Neue"/>
-              </a:rPr>
-              <a:t>American Pride</a:t>
-            </a:r>
-          </a:p>
-        </p:txBody>
-      </p:sp>
-      <p:sp>
-        <p:nvSpPr>
-          <p:cNvPr id="34" name="Rectangle 33"/>
-          <p:cNvSpPr/>
-          <p:nvPr/>
-        </p:nvSpPr>
-        <p:spPr>
-          <a:xfrm>
-            <a:off x="4114800" y="5308507"/>
-            <a:ext cx="293275" cy="143810"/>
-          </a:xfrm>
-          <a:prstGeom prst="rect">
-            <a:avLst/>
-          </a:prstGeom>
-          <a:solidFill>
-            <a:srgbClr val="990011"/>
-          </a:solidFill>
-          <a:ln>
-            <a:noFill/>
-          </a:ln>
-          <a:effectLst/>
-        </p:spPr>
-        <p:style>
-          <a:lnRef idx="1">
-            <a:schemeClr val="accent1"/>
-          </a:lnRef>
-          <a:fillRef idx="3">
-            <a:schemeClr val="accent1"/>
-          </a:fillRef>
-          <a:effectRef idx="2">
-            <a:schemeClr val="accent1"/>
-          </a:effectRef>
-          <a:fontRef idx="minor">
-            <a:schemeClr val="lt1"/>
-          </a:fontRef>
-        </p:style>
-        <p:txBody>
-          <a:bodyPr rtlCol="0" anchor="ctr"/>
-          <a:lstStyle/>
-          <a:p>
-            <a:pPr algn="ctr"/>
-          </a:p>
-        </p:txBody>
-      </p:sp>
-      <p:sp>
-        <p:nvSpPr>
-          <p:cNvPr id="35" name="TextBox 34"/>
-          <p:cNvSpPr txBox="1"/>
-          <p:nvPr/>
-        </p:nvSpPr>
-        <p:spPr>
-          <a:xfrm>
-            <a:off x="4499515" y="5226211"/>
-            <a:ext cx="2286000" cy="344978"/>
-          </a:xfrm>
-          <a:prstGeom prst="rect">
-            <a:avLst/>
-          </a:prstGeom>
-          <a:noFill/>
-        </p:spPr>
-        <p:txBody>
-          <a:bodyPr wrap="square" lIns="0" rIns="0" tIns="0" bIns="0">
-            <a:spAutoFit/>
-          </a:bodyPr>
-          <a:lstStyle/>
-          <a:p>
-            <a:r>
-              <a:rPr sz="900" b="0">
-                <a:solidFill>
-                  <a:srgbClr val="6B7082"/>
-                </a:solidFill>
-                <a:latin typeface="Helvetica Neue"/>
-              </a:rPr>
-              <a:t>3,367 views · 6 posts</a:t>
             </a:r>
           </a:p>
         </p:txBody>
@@ -11767,7 +11767,7 @@
         <p:spPr>
           <a:xfrm>
             <a:off x="4114800" y="5653485"/>
-            <a:ext cx="95203" cy="143810"/>
+            <a:ext cx="98270" cy="143810"/>
           </a:xfrm>
           <a:prstGeom prst="rect">
             <a:avLst/>
@@ -11810,7 +11810,7 @@
         </p:nvSpPr>
         <p:spPr>
           <a:xfrm>
-            <a:off x="4301443" y="5571189"/>
+            <a:off x="4304510" y="5571189"/>
             <a:ext cx="2286000" cy="344978"/>
           </a:xfrm>
           <a:prstGeom prst="rect">
@@ -11831,7 +11831,7 @@
                 </a:solidFill>
                 <a:latin typeface="Helvetica Neue"/>
               </a:rPr>
-              <a:t>1,093 views · 2 posts</a:t>
+              <a:t>1,100 views · 2 posts</a:t>
             </a:r>
           </a:p>
         </p:txBody>
@@ -11995,7 +11995,7 @@
                 </a:solidFill>
                 <a:latin typeface="Georgia"/>
               </a:rPr>
-              <a:t>FIFA / World Cup</a:t>
+              <a:t>Truth &amp; Scandal Reporting</a:t>
             </a:r>
           </a:p>
         </p:txBody>
@@ -12029,7 +12029,7 @@
                 </a:solidFill>
                 <a:latin typeface="Helvetica Neue"/>
               </a:rPr>
-              <a:t>Sports commentary — split between celebration and critique.</a:t>
+              <a:t>Investigative — the heat that drives peak reach.</a:t>
             </a:r>
           </a:p>
         </p:txBody>
@@ -12093,7 +12093,7 @@
             <a:avLst/>
           </a:prstGeom>
           <a:solidFill>
-            <a:srgbClr val="6B7082"/>
+            <a:srgbClr val="990011"/>
           </a:solidFill>
           <a:ln>
             <a:noFill/>
@@ -12147,7 +12147,7 @@
             <a:r>
               <a:rPr sz="1100" b="1">
                 <a:solidFill>
-                  <a:srgbClr val="6B7082"/>
+                  <a:srgbClr val="990011"/>
                 </a:solidFill>
                 <a:latin typeface="Helvetica Neue"/>
               </a:rPr>
@@ -12185,7 +12185,7 @@
                 </a:solidFill>
                 <a:latin typeface="Georgia"/>
               </a:rPr>
-              <a:t>71,386</a:t>
+              <a:t>69,601</a:t>
             </a:r>
           </a:p>
         </p:txBody>
@@ -12219,7 +12219,7 @@
                 </a:solidFill>
                 <a:latin typeface="Helvetica Neue"/>
               </a:rPr>
-              <a:t>21 posts · 1,435 likes</a:t>
+              <a:t>27 posts · 1,714 likes</a:t>
             </a:r>
           </a:p>
         </p:txBody>
@@ -12253,7 +12253,7 @@
                 </a:solidFill>
                 <a:latin typeface="Helvetica Neue"/>
               </a:rPr>
-              <a:t>3,399 average views per post</a:t>
+              <a:t>2,578 average views per post</a:t>
             </a:r>
           </a:p>
         </p:txBody>
@@ -12283,7 +12283,7 @@
             <a:r>
               <a:rPr sz="1100" b="1">
                 <a:solidFill>
-                  <a:srgbClr val="6B7082"/>
+                  <a:srgbClr val="990011"/>
                 </a:solidFill>
                 <a:latin typeface="Helvetica Neue"/>
               </a:rPr>
@@ -12351,7 +12351,7 @@
             <a:avLst/>
           </a:prstGeom>
           <a:solidFill>
-            <a:srgbClr val="6B7082"/>
+            <a:srgbClr val="990011"/>
           </a:solidFill>
           <a:ln>
             <a:noFill/>
@@ -12405,11 +12405,11 @@
             <a:r>
               <a:rPr sz="1000" b="1">
                 <a:solidFill>
-                  <a:srgbClr val="6B7082"/>
-                </a:solidFill>
-                <a:latin typeface="Helvetica Neue"/>
-              </a:rPr>
-              <a:t>#1  ·  TT  ·  27,200 views</a:t>
+                  <a:srgbClr val="990011"/>
+                </a:solidFill>
+                <a:latin typeface="Helvetica Neue"/>
+              </a:rPr>
+              <a:t>#1  ·  TT  ·  9,839 views</a:t>
             </a:r>
           </a:p>
         </p:txBody>
@@ -12443,7 +12443,7 @@
                 </a:solidFill>
                 <a:latin typeface="Helvetica Neue"/>
               </a:rPr>
-              <a:t>Watch party in Stonewood Mall! Over 25,000 people showed up for this epic event. Cost $300</a:t>
+              <a:t>Grew up in Huntington Park and still own property there. The city's o...</a:t>
             </a:r>
           </a:p>
         </p:txBody>
@@ -12507,7 +12507,7 @@
             <a:avLst/>
           </a:prstGeom>
           <a:solidFill>
-            <a:srgbClr val="6B7082"/>
+            <a:srgbClr val="990011"/>
           </a:solidFill>
           <a:ln>
             <a:noFill/>
@@ -12561,11 +12561,11 @@
             <a:r>
               <a:rPr sz="1000" b="1">
                 <a:solidFill>
-                  <a:srgbClr val="6B7082"/>
-                </a:solidFill>
-                <a:latin typeface="Helvetica Neue"/>
-              </a:rPr>
-              <a:t>#2  ·  IG  ·  15,935 views</a:t>
+                  <a:srgbClr val="990011"/>
+                </a:solidFill>
+                <a:latin typeface="Helvetica Neue"/>
+              </a:rPr>
+              <a:t>#2  ·  IG  ·  7,031 views</a:t>
             </a:r>
           </a:p>
         </p:txBody>
@@ -12599,7 +12599,7 @@
                 </a:solidFill>
                 <a:latin typeface="Helvetica Neue"/>
               </a:rPr>
-              <a:t>25,000+ people gathered for a watch party at Stonewood Mall! Despite the $300k cost, it wa</a:t>
+              <a:t>A woman's outburst at a city council meeting, repeatedly warned by the mayor, led to her f</a:t>
             </a:r>
           </a:p>
         </p:txBody>
@@ -12663,7 +12663,7 @@
             <a:avLst/>
           </a:prstGeom>
           <a:solidFill>
-            <a:srgbClr val="6B7082"/>
+            <a:srgbClr val="990011"/>
           </a:solidFill>
           <a:ln>
             <a:noFill/>
@@ -12717,11 +12717,11 @@
             <a:r>
               <a:rPr sz="1000" b="1">
                 <a:solidFill>
-                  <a:srgbClr val="6B7082"/>
-                </a:solidFill>
-                <a:latin typeface="Helvetica Neue"/>
-              </a:rPr>
-              <a:t>#3  ·  FB  ·  6,341 views</a:t>
+                  <a:srgbClr val="990011"/>
+                </a:solidFill>
+                <a:latin typeface="Helvetica Neue"/>
+              </a:rPr>
+              <a:t>#3  ·  FB  ·  6,363 views</a:t>
             </a:r>
           </a:p>
         </p:txBody>
@@ -12755,7 +12755,7 @@
                 </a:solidFill>
                 <a:latin typeface="Helvetica Neue"/>
               </a:rPr>
-              <a:t>Over 25,000 people gathered at Stonewood Mall for a massive watch party. Despite the $300,</a:t>
+              <a:t>After admitting 'I messed up,' a city councilman's inappropriate conduct is under scrutiny</a:t>
             </a:r>
           </a:p>
         </p:txBody>
@@ -12829,7 +12829,7 @@
             <a:r>
               <a:rPr sz="1000" b="1">
                 <a:solidFill>
-                  <a:srgbClr val="6B7082"/>
+                  <a:srgbClr val="990011"/>
                 </a:solidFill>
                 <a:latin typeface="Helvetica Neue"/>
               </a:rPr>
@@ -12867,7 +12867,7 @@
                 </a:solidFill>
                 <a:latin typeface="Helvetica Neue"/>
               </a:rPr>
-              <a:t>Strong performer. Keep investing — FIFA / World Cup is a proven driver of reach.</a:t>
+              <a:t>Solid mid-tier. Worth continued investment. Test scaling to see if it holds.</a:t>
             </a:r>
           </a:p>
         </p:txBody>
@@ -12997,7 +12997,7 @@
                 </a:solidFill>
                 <a:latin typeface="Georgia"/>
               </a:rPr>
-              <a:t>Truth &amp; Scandal Reporting</a:t>
+              <a:t>FIFA / World Cup</a:t>
             </a:r>
           </a:p>
         </p:txBody>
@@ -13031,7 +13031,7 @@
                 </a:solidFill>
                 <a:latin typeface="Helvetica Neue"/>
               </a:rPr>
-              <a:t>Investigative — the heat that drives peak reach.</a:t>
+              <a:t>Sports commentary — split between celebration and critique.</a:t>
             </a:r>
           </a:p>
         </p:txBody>
@@ -13095,7 +13095,7 @@
             <a:avLst/>
           </a:prstGeom>
           <a:solidFill>
-            <a:srgbClr val="990011"/>
+            <a:srgbClr val="6B7082"/>
           </a:solidFill>
           <a:ln>
             <a:noFill/>
@@ -13149,7 +13149,7 @@
             <a:r>
               <a:rPr sz="1100" b="1">
                 <a:solidFill>
-                  <a:srgbClr val="990011"/>
+                  <a:srgbClr val="6B7082"/>
                 </a:solidFill>
                 <a:latin typeface="Helvetica Neue"/>
               </a:rPr>
@@ -13187,7 +13187,7 @@
                 </a:solidFill>
                 <a:latin typeface="Georgia"/>
               </a:rPr>
-              <a:t>69,600</a:t>
+              <a:t>61,073</a:t>
             </a:r>
           </a:p>
         </p:txBody>
@@ -13221,7 +13221,7 @@
                 </a:solidFill>
                 <a:latin typeface="Helvetica Neue"/>
               </a:rPr>
-              <a:t>27 posts · 1,714 likes</a:t>
+              <a:t>21 posts · 1,444 likes</a:t>
             </a:r>
           </a:p>
         </p:txBody>
@@ -13255,7 +13255,7 @@
                 </a:solidFill>
                 <a:latin typeface="Helvetica Neue"/>
               </a:rPr>
-              <a:t>2,578 average views per post</a:t>
+              <a:t>2,908 average views per post</a:t>
             </a:r>
           </a:p>
         </p:txBody>
@@ -13285,7 +13285,7 @@
             <a:r>
               <a:rPr sz="1100" b="1">
                 <a:solidFill>
-                  <a:srgbClr val="990011"/>
+                  <a:srgbClr val="6B7082"/>
                 </a:solidFill>
                 <a:latin typeface="Helvetica Neue"/>
               </a:rPr>
@@ -13353,7 +13353,7 @@
             <a:avLst/>
           </a:prstGeom>
           <a:solidFill>
-            <a:srgbClr val="990011"/>
+            <a:srgbClr val="6B7082"/>
           </a:solidFill>
           <a:ln>
             <a:noFill/>
@@ -13407,11 +13407,11 @@
             <a:r>
               <a:rPr sz="1000" b="1">
                 <a:solidFill>
-                  <a:srgbClr val="990011"/>
-                </a:solidFill>
-                <a:latin typeface="Helvetica Neue"/>
-              </a:rPr>
-              <a:t>#1  ·  TT  ·  9,839 views</a:t>
+                  <a:srgbClr val="6B7082"/>
+                </a:solidFill>
+                <a:latin typeface="Helvetica Neue"/>
+              </a:rPr>
+              <a:t>#1  ·  TT  ·  27,300 views</a:t>
             </a:r>
           </a:p>
         </p:txBody>
@@ -13445,7 +13445,7 @@
                 </a:solidFill>
                 <a:latin typeface="Helvetica Neue"/>
               </a:rPr>
-              <a:t>Grew up in Huntington Park and still own property there. The city's o...</a:t>
+              <a:t>Watch party in Stonewood Mall! Over 25,000 people showed up for this epic event. Cost $300</a:t>
             </a:r>
           </a:p>
         </p:txBody>
@@ -13509,7 +13509,7 @@
             <a:avLst/>
           </a:prstGeom>
           <a:solidFill>
-            <a:srgbClr val="990011"/>
+            <a:srgbClr val="6B7082"/>
           </a:solidFill>
           <a:ln>
             <a:noFill/>
@@ -13563,11 +13563,11 @@
             <a:r>
               <a:rPr sz="1000" b="1">
                 <a:solidFill>
-                  <a:srgbClr val="990011"/>
-                </a:solidFill>
-                <a:latin typeface="Helvetica Neue"/>
-              </a:rPr>
-              <a:t>#2  ·  IG  ·  7,031 views</a:t>
+                  <a:srgbClr val="6B7082"/>
+                </a:solidFill>
+                <a:latin typeface="Helvetica Neue"/>
+              </a:rPr>
+              <a:t>#2  ·  IG  ·  7,180 views</a:t>
             </a:r>
           </a:p>
         </p:txBody>
@@ -13601,7 +13601,7 @@
                 </a:solidFill>
                 <a:latin typeface="Helvetica Neue"/>
               </a:rPr>
-              <a:t>A woman's outburst at a city council meeting, repeatedly warned by the mayor, led to her f</a:t>
+              <a:t>25,000+ people gathered for a watch party at Stonewood Mall! Despite the $300k cost, it wa</a:t>
             </a:r>
           </a:p>
         </p:txBody>
@@ -13665,7 +13665,7 @@
             <a:avLst/>
           </a:prstGeom>
           <a:solidFill>
-            <a:srgbClr val="990011"/>
+            <a:srgbClr val="6B7082"/>
           </a:solidFill>
           <a:ln>
             <a:noFill/>
@@ -13719,11 +13719,11 @@
             <a:r>
               <a:rPr sz="1000" b="1">
                 <a:solidFill>
-                  <a:srgbClr val="990011"/>
-                </a:solidFill>
-                <a:latin typeface="Helvetica Neue"/>
-              </a:rPr>
-              <a:t>#3  ·  FB  ·  6,363 views</a:t>
+                  <a:srgbClr val="6B7082"/>
+                </a:solidFill>
+                <a:latin typeface="Helvetica Neue"/>
+              </a:rPr>
+              <a:t>#3  ·  FB  ·  6,355 views</a:t>
             </a:r>
           </a:p>
         </p:txBody>
@@ -13757,7 +13757,7 @@
                 </a:solidFill>
                 <a:latin typeface="Helvetica Neue"/>
               </a:rPr>
-              <a:t>After admitting 'I messed up,' a city councilman's inappropriate conduct is under scrutiny</a:t>
+              <a:t>Over 25,000 people gathered at Stonewood Mall for a massive watch party. Despite the $300,</a:t>
             </a:r>
           </a:p>
         </p:txBody>
@@ -13831,7 +13831,7 @@
             <a:r>
               <a:rPr sz="1000" b="1">
                 <a:solidFill>
-                  <a:srgbClr val="990011"/>
+                  <a:srgbClr val="6B7082"/>
                 </a:solidFill>
                 <a:latin typeface="Helvetica Neue"/>
               </a:rPr>
@@ -14189,7 +14189,7 @@
                 </a:solidFill>
                 <a:latin typeface="Georgia"/>
               </a:rPr>
-              <a:t>46,344</a:t>
+              <a:t>45,534</a:t>
             </a:r>
           </a:p>
         </p:txBody>
@@ -14257,7 +14257,7 @@
                 </a:solidFill>
                 <a:latin typeface="Helvetica Neue"/>
               </a:rPr>
-              <a:t>3,565 average views per post</a:t>
+              <a:t>3,503 average views per post</a:t>
             </a:r>
           </a:p>
         </p:txBody>
@@ -15001,7 +15001,7 @@
                 </a:solidFill>
                 <a:latin typeface="Georgia"/>
               </a:rPr>
-              <a:t>Other / Uncategorized</a:t>
+              <a:t>Food &amp; Local Flavor</a:t>
             </a:r>
           </a:p>
         </p:txBody>
@@ -15035,7 +15035,7 @@
                 </a:solidFill>
                 <a:latin typeface="Helvetica Neue"/>
               </a:rPr>
-              <a:t>Content that doesn't fit the above buckets — usually casual/BTS.</a:t>
+              <a:t>Restaurants, chefs, dining — the everyday Downey.</a:t>
             </a:r>
           </a:p>
         </p:txBody>
@@ -15099,7 +15099,7 @@
             <a:avLst/>
           </a:prstGeom>
           <a:solidFill>
-            <a:srgbClr val="6B7082"/>
+            <a:srgbClr val="1B7A43"/>
           </a:solidFill>
           <a:ln>
             <a:noFill/>
@@ -15153,7 +15153,7 @@
             <a:r>
               <a:rPr sz="1100" b="1">
                 <a:solidFill>
-                  <a:srgbClr val="6B7082"/>
+                  <a:srgbClr val="1B7A43"/>
                 </a:solidFill>
                 <a:latin typeface="Helvetica Neue"/>
               </a:rPr>
@@ -15191,7 +15191,7 @@
                 </a:solidFill>
                 <a:latin typeface="Georgia"/>
               </a:rPr>
-              <a:t>39,882</a:t>
+              <a:t>36,342</a:t>
             </a:r>
           </a:p>
         </p:txBody>
@@ -15225,7 +15225,7 @@
                 </a:solidFill>
                 <a:latin typeface="Helvetica Neue"/>
               </a:rPr>
-              <a:t>56 posts · 924 likes</a:t>
+              <a:t>27 posts · 1,391 likes</a:t>
             </a:r>
           </a:p>
         </p:txBody>
@@ -15259,7 +15259,7 @@
                 </a:solidFill>
                 <a:latin typeface="Helvetica Neue"/>
               </a:rPr>
-              <a:t>712 average views per post</a:t>
+              <a:t>1,346 average views per post</a:t>
             </a:r>
           </a:p>
         </p:txBody>
@@ -15289,7 +15289,7 @@
             <a:r>
               <a:rPr sz="1100" b="1">
                 <a:solidFill>
-                  <a:srgbClr val="6B7082"/>
+                  <a:srgbClr val="1B7A43"/>
                 </a:solidFill>
                 <a:latin typeface="Helvetica Neue"/>
               </a:rPr>
@@ -15357,7 +15357,7 @@
             <a:avLst/>
           </a:prstGeom>
           <a:solidFill>
-            <a:srgbClr val="6B7082"/>
+            <a:srgbClr val="1B7A43"/>
           </a:solidFill>
           <a:ln>
             <a:noFill/>
@@ -15411,11 +15411,11 @@
             <a:r>
               <a:rPr sz="1000" b="1">
                 <a:solidFill>
-                  <a:srgbClr val="6B7082"/>
-                </a:solidFill>
-                <a:latin typeface="Helvetica Neue"/>
-              </a:rPr>
-              <a:t>#1  ·  IG  ·  5,443 views</a:t>
+                  <a:srgbClr val="1B7A43"/>
+                </a:solidFill>
+                <a:latin typeface="Helvetica Neue"/>
+              </a:rPr>
+              <a:t>#1  ·  TT  ·  13,600 views</a:t>
             </a:r>
           </a:p>
         </p:txBody>
@@ -15449,7 +15449,7 @@
                 </a:solidFill>
                 <a:latin typeface="Helvetica Neue"/>
               </a:rPr>
-              <a:t>Guilty or not guilty? It's immaterial. Our principles demand everyone deserves a defense, </a:t>
+              <a:t>Mama Lu's is coming to Downey! Asian community favorite, famous for their tenderloin. Get </a:t>
             </a:r>
           </a:p>
         </p:txBody>
@@ -15513,7 +15513,7 @@
             <a:avLst/>
           </a:prstGeom>
           <a:solidFill>
-            <a:srgbClr val="6B7082"/>
+            <a:srgbClr val="1B7A43"/>
           </a:solidFill>
           <a:ln>
             <a:noFill/>
@@ -15567,11 +15567,11 @@
             <a:r>
               <a:rPr sz="1000" b="1">
                 <a:solidFill>
-                  <a:srgbClr val="6B7082"/>
-                </a:solidFill>
-                <a:latin typeface="Helvetica Neue"/>
-              </a:rPr>
-              <a:t>#2  ·  IG  ·  3,717 views</a:t>
+                  <a:srgbClr val="1B7A43"/>
+                </a:solidFill>
+                <a:latin typeface="Helvetica Neue"/>
+              </a:rPr>
+              <a:t>#2  ·  TT  ·  3,346 views</a:t>
             </a:r>
           </a:p>
         </p:txBody>
@@ -15605,7 +15605,7 @@
                 </a:solidFill>
                 <a:latin typeface="Helvetica Neue"/>
               </a:rPr>
-              <a:t>Don't believe the fake rumors. Married 42 years, no strippers, no cocaine at my bachelor p</a:t>
+              <a:t>Downey's food scene is wild! Porto's, pho, Mongolian BBQ, Waba Grill, poke, and Starfish S</a:t>
             </a:r>
           </a:p>
         </p:txBody>
@@ -15669,7 +15669,7 @@
             <a:avLst/>
           </a:prstGeom>
           <a:solidFill>
-            <a:srgbClr val="6B7082"/>
+            <a:srgbClr val="1B7A43"/>
           </a:solidFill>
           <a:ln>
             <a:noFill/>
@@ -15723,11 +15723,11 @@
             <a:r>
               <a:rPr sz="1000" b="1">
                 <a:solidFill>
-                  <a:srgbClr val="6B7082"/>
-                </a:solidFill>
-                <a:latin typeface="Helvetica Neue"/>
-              </a:rPr>
-              <a:t>#3  ·  IG  ·  1,626 views</a:t>
+                  <a:srgbClr val="1B7A43"/>
+                </a:solidFill>
+                <a:latin typeface="Helvetica Neue"/>
+              </a:rPr>
+              <a:t>#3  ·  IG  ·  2,326 views</a:t>
             </a:r>
           </a:p>
         </p:txBody>
@@ -15761,7 +15761,7 @@
                 </a:solidFill>
                 <a:latin typeface="Helvetica Neue"/>
               </a:rPr>
-              <a:t>Truth revealed: Accusations of attacking opponents, fueling division, and demeaning women </a:t>
+              <a:t>So many food choices right next to Porto's downtown Downey! From pho and Mongolian BBQ to </a:t>
             </a:r>
           </a:p>
         </p:txBody>
@@ -15835,7 +15835,7 @@
             <a:r>
               <a:rPr sz="1000" b="1">
                 <a:solidFill>
-                  <a:srgbClr val="6B7082"/>
+                  <a:srgbClr val="1B7A43"/>
                 </a:solidFill>
                 <a:latin typeface="Helvetica Neue"/>
               </a:rPr>
@@ -15873,7 +15873,7 @@
                 </a:solidFill>
                 <a:latin typeface="Helvetica Neue"/>
               </a:rPr>
-              <a:t>Modest reach. Fine as filler between heavy hitters, not a headline lane.</a:t>
+              <a:t>Solid mid-tier. Worth continued investment. Test scaling to see if it holds.</a:t>
             </a:r>
           </a:p>
         </p:txBody>
@@ -16003,7 +16003,7 @@
                 </a:solidFill>
                 <a:latin typeface="Georgia"/>
               </a:rPr>
-              <a:t>Food &amp; Local Flavor</a:t>
+              <a:t>Other / Uncategorized</a:t>
             </a:r>
           </a:p>
         </p:txBody>
@@ -16037,7 +16037,7 @@
                 </a:solidFill>
                 <a:latin typeface="Helvetica Neue"/>
               </a:rPr>
-              <a:t>Restaurants, chefs, dining — the everyday Downey.</a:t>
+              <a:t>Content that doesn't fit the above buckets — usually casual/BTS.</a:t>
             </a:r>
           </a:p>
         </p:txBody>
@@ -16101,7 +16101,7 @@
             <a:avLst/>
           </a:prstGeom>
           <a:solidFill>
-            <a:srgbClr val="1B7A43"/>
+            <a:srgbClr val="6B7082"/>
           </a:solidFill>
           <a:ln>
             <a:noFill/>
@@ -16155,7 +16155,7 @@
             <a:r>
               <a:rPr sz="1100" b="1">
                 <a:solidFill>
-                  <a:srgbClr val="1B7A43"/>
+                  <a:srgbClr val="6B7082"/>
                 </a:solidFill>
                 <a:latin typeface="Helvetica Neue"/>
               </a:rPr>
@@ -16193,7 +16193,7 @@
                 </a:solidFill>
                 <a:latin typeface="Georgia"/>
               </a:rPr>
-              <a:t>37,026</a:t>
+              <a:t>35,940</a:t>
             </a:r>
           </a:p>
         </p:txBody>
@@ -16227,7 +16227,7 @@
                 </a:solidFill>
                 <a:latin typeface="Helvetica Neue"/>
               </a:rPr>
-              <a:t>27 posts · 1,387 likes</a:t>
+              <a:t>65 posts · 1,425 likes</a:t>
             </a:r>
           </a:p>
         </p:txBody>
@@ -16261,7 +16261,7 @@
                 </a:solidFill>
                 <a:latin typeface="Helvetica Neue"/>
               </a:rPr>
-              <a:t>1,371 average views per post</a:t>
+              <a:t>553 average views per post</a:t>
             </a:r>
           </a:p>
         </p:txBody>
@@ -16291,7 +16291,7 @@
             <a:r>
               <a:rPr sz="1100" b="1">
                 <a:solidFill>
-                  <a:srgbClr val="1B7A43"/>
+                  <a:srgbClr val="6B7082"/>
                 </a:solidFill>
                 <a:latin typeface="Helvetica Neue"/>
               </a:rPr>
@@ -16359,7 +16359,7 @@
             <a:avLst/>
           </a:prstGeom>
           <a:solidFill>
-            <a:srgbClr val="1B7A43"/>
+            <a:srgbClr val="6B7082"/>
           </a:solidFill>
           <a:ln>
             <a:noFill/>
@@ -16413,11 +16413,11 @@
             <a:r>
               <a:rPr sz="1000" b="1">
                 <a:solidFill>
-                  <a:srgbClr val="1B7A43"/>
-                </a:solidFill>
-                <a:latin typeface="Helvetica Neue"/>
-              </a:rPr>
-              <a:t>#1  ·  TT  ·  13,600 views</a:t>
+                  <a:srgbClr val="6B7082"/>
+                </a:solidFill>
+                <a:latin typeface="Helvetica Neue"/>
+              </a:rPr>
+              <a:t>#1  ·  TT  ·  5,704 views</a:t>
             </a:r>
           </a:p>
         </p:txBody>
@@ -16451,7 +16451,7 @@
                 </a:solidFill>
                 <a:latin typeface="Helvetica Neue"/>
               </a:rPr>
-              <a:t>Mama Lu's is coming to Downey! Asian community favorite, famous for their tenderloin. Get </a:t>
+              <a:t>Pop's Wings just opened and it's a must-try! Their pastrami sandwich with sweet potato fri</a:t>
             </a:r>
           </a:p>
         </p:txBody>
@@ -16515,7 +16515,7 @@
             <a:avLst/>
           </a:prstGeom>
           <a:solidFill>
-            <a:srgbClr val="1B7A43"/>
+            <a:srgbClr val="6B7082"/>
           </a:solidFill>
           <a:ln>
             <a:noFill/>
@@ -16569,11 +16569,11 @@
             <a:r>
               <a:rPr sz="1000" b="1">
                 <a:solidFill>
-                  <a:srgbClr val="1B7A43"/>
-                </a:solidFill>
-                <a:latin typeface="Helvetica Neue"/>
-              </a:rPr>
-              <a:t>#2  ·  TT  ·  3,346 views</a:t>
+                  <a:srgbClr val="6B7082"/>
+                </a:solidFill>
+                <a:latin typeface="Helvetica Neue"/>
+              </a:rPr>
+              <a:t>#2  ·  IG  ·  3,717 views</a:t>
             </a:r>
           </a:p>
         </p:txBody>
@@ -16607,7 +16607,7 @@
                 </a:solidFill>
                 <a:latin typeface="Helvetica Neue"/>
               </a:rPr>
-              <a:t>Downey's food scene is wild! Porto's, pho, Mongolian BBQ, Waba Grill, poke, and Starfish S</a:t>
+              <a:t>Don't believe the fake rumors. Married 42 years, no strippers, no cocaine at my bachelor p</a:t>
             </a:r>
           </a:p>
         </p:txBody>
@@ -16671,7 +16671,7 @@
             <a:avLst/>
           </a:prstGeom>
           <a:solidFill>
-            <a:srgbClr val="1B7A43"/>
+            <a:srgbClr val="6B7082"/>
           </a:solidFill>
           <a:ln>
             <a:noFill/>
@@ -16725,11 +16725,11 @@
             <a:r>
               <a:rPr sz="1000" b="1">
                 <a:solidFill>
-                  <a:srgbClr val="1B7A43"/>
-                </a:solidFill>
-                <a:latin typeface="Helvetica Neue"/>
-              </a:rPr>
-              <a:t>#3  ·  IG  ·  2,326 views</a:t>
+                  <a:srgbClr val="6B7082"/>
+                </a:solidFill>
+                <a:latin typeface="Helvetica Neue"/>
+              </a:rPr>
+              <a:t>#3  ·  IG  ·  1,626 views</a:t>
             </a:r>
           </a:p>
         </p:txBody>
@@ -16763,7 +16763,7 @@
                 </a:solidFill>
                 <a:latin typeface="Helvetica Neue"/>
               </a:rPr>
-              <a:t>So many food choices right next to Porto's downtown Downey! From pho and Mongolian BBQ to </a:t>
+              <a:t>Truth revealed: Accusations of attacking opponents, fueling division, and demeaning women </a:t>
             </a:r>
           </a:p>
         </p:txBody>
@@ -16837,7 +16837,7 @@
             <a:r>
               <a:rPr sz="1000" b="1">
                 <a:solidFill>
-                  <a:srgbClr val="1B7A43"/>
+                  <a:srgbClr val="6B7082"/>
                 </a:solidFill>
                 <a:latin typeface="Helvetica Neue"/>
               </a:rPr>
@@ -16875,7 +16875,7 @@
                 </a:solidFill>
                 <a:latin typeface="Helvetica Neue"/>
               </a:rPr>
-              <a:t>Solid mid-tier. Worth continued investment. Test scaling to see if it holds.</a:t>
+              <a:t>Modest reach. Fine as filler between heavy hitters, not a headline lane.</a:t>
             </a:r>
           </a:p>
         </p:txBody>
@@ -17195,7 +17195,7 @@
                 </a:solidFill>
                 <a:latin typeface="Georgia"/>
               </a:rPr>
-              <a:t>28,028</a:t>
+              <a:t>25,832</a:t>
             </a:r>
           </a:p>
         </p:txBody>
@@ -17229,7 +17229,7 @@
                 </a:solidFill>
                 <a:latin typeface="Helvetica Neue"/>
               </a:rPr>
-              <a:t>35 posts · 481 likes</a:t>
+              <a:t>35 posts · 489 likes</a:t>
             </a:r>
           </a:p>
         </p:txBody>
@@ -17263,7 +17263,7 @@
                 </a:solidFill>
                 <a:latin typeface="Helvetica Neue"/>
               </a:rPr>
-              <a:t>801 average views per post</a:t>
+              <a:t>738 average views per post</a:t>
             </a:r>
           </a:p>
         </p:txBody>
@@ -18197,7 +18197,7 @@
                 </a:solidFill>
                 <a:latin typeface="Georgia"/>
               </a:rPr>
-              <a:t>23,968</a:t>
+              <a:t>25,075</a:t>
             </a:r>
           </a:p>
         </p:txBody>
@@ -18231,7 +18231,7 @@
                 </a:solidFill>
                 <a:latin typeface="Helvetica Neue"/>
               </a:rPr>
-              <a:t>31 posts · 504 likes</a:t>
+              <a:t>36 posts · 667 likes</a:t>
             </a:r>
           </a:p>
         </p:txBody>
@@ -18265,7 +18265,7 @@
                 </a:solidFill>
                 <a:latin typeface="Helvetica Neue"/>
               </a:rPr>
-              <a:t>773 average views per post</a:t>
+              <a:t>697 average views per post</a:t>
             </a:r>
           </a:p>
         </p:txBody>

--- a/SPONSOR_CONTENT_REPORT.pptx
+++ b/SPONSOR_CONTENT_REPORT.pptx
@@ -3322,7 +3322,7 @@
                 </a:solidFill>
                 <a:latin typeface="Helvetica Neue"/>
               </a:rPr>
-              <a:t>Reporting window: Jun 8 → 2026-07-22</a:t>
+              <a:t>Reporting window: Jun 8 → 2026-07-24</a:t>
             </a:r>
           </a:p>
         </p:txBody>
@@ -3554,7 +3554,7 @@
                 </a:solidFill>
                 <a:latin typeface="Georgia"/>
               </a:rPr>
-              <a:t>Resident Highlights</a:t>
+              <a:t>Community &amp; Culture</a:t>
             </a:r>
           </a:p>
         </p:txBody>
@@ -3588,7 +3588,7 @@
                 </a:solidFill>
                 <a:latin typeface="Helvetica Neue"/>
               </a:rPr>
-              <a:t>Non-political citizen profiles — small business owners, community members. Granata, Gately, the deacon.</a:t>
+              <a:t>Local color, events, city life.</a:t>
             </a:r>
           </a:p>
         </p:txBody>
@@ -3652,7 +3652,7 @@
             <a:avLst/>
           </a:prstGeom>
           <a:solidFill>
-            <a:srgbClr val="1B7A43"/>
+            <a:srgbClr val="141833"/>
           </a:solidFill>
           <a:ln>
             <a:noFill/>
@@ -3706,7 +3706,7 @@
             <a:r>
               <a:rPr sz="1100" b="1">
                 <a:solidFill>
-                  <a:srgbClr val="1B7A43"/>
+                  <a:srgbClr val="141833"/>
                 </a:solidFill>
                 <a:latin typeface="Helvetica Neue"/>
               </a:rPr>
@@ -3744,7 +3744,7 @@
                 </a:solidFill>
                 <a:latin typeface="Georgia"/>
               </a:rPr>
-              <a:t>7,302</a:t>
+              <a:t>25,952</a:t>
             </a:r>
           </a:p>
         </p:txBody>
@@ -3778,7 +3778,7 @@
                 </a:solidFill>
                 <a:latin typeface="Helvetica Neue"/>
               </a:rPr>
-              <a:t>6 posts · 134 likes</a:t>
+              <a:t>37 posts · 872 likes</a:t>
             </a:r>
           </a:p>
         </p:txBody>
@@ -3812,7 +3812,7 @@
                 </a:solidFill>
                 <a:latin typeface="Helvetica Neue"/>
               </a:rPr>
-              <a:t>1,217 average views per post</a:t>
+              <a:t>701 average views per post</a:t>
             </a:r>
           </a:p>
         </p:txBody>
@@ -3842,7 +3842,7 @@
             <a:r>
               <a:rPr sz="1100" b="1">
                 <a:solidFill>
-                  <a:srgbClr val="1B7A43"/>
+                  <a:srgbClr val="141833"/>
                 </a:solidFill>
                 <a:latin typeface="Helvetica Neue"/>
               </a:rPr>
@@ -3910,7 +3910,7 @@
             <a:avLst/>
           </a:prstGeom>
           <a:solidFill>
-            <a:srgbClr val="1B7A43"/>
+            <a:srgbClr val="141833"/>
           </a:solidFill>
           <a:ln>
             <a:noFill/>
@@ -3964,11 +3964,11 @@
             <a:r>
               <a:rPr sz="1000" b="1">
                 <a:solidFill>
-                  <a:srgbClr val="1B7A43"/>
-                </a:solidFill>
-                <a:latin typeface="Helvetica Neue"/>
-              </a:rPr>
-              <a:t>#1  ·  IG  ·  3,551 views</a:t>
+                  <a:srgbClr val="141833"/>
+                </a:solidFill>
+                <a:latin typeface="Helvetica Neue"/>
+              </a:rPr>
+              <a:t>#1  ·  IG  ·  2,848 views</a:t>
             </a:r>
           </a:p>
         </p:txBody>
@@ -4002,7 +4002,7 @@
                 </a:solidFill>
                 <a:latin typeface="Helvetica Neue"/>
               </a:rPr>
-              <a:t>Almost ran over a family. I got the license plate, checked on them. Turns out he's a Catho</a:t>
+              <a:t>Responded to your yapping, Downey! This one's to answer the last two shows. Wouldn't have </a:t>
             </a:r>
           </a:p>
         </p:txBody>
@@ -4066,7 +4066,7 @@
             <a:avLst/>
           </a:prstGeom>
           <a:solidFill>
-            <a:srgbClr val="1B7A43"/>
+            <a:srgbClr val="141833"/>
           </a:solidFill>
           <a:ln>
             <a:noFill/>
@@ -4120,11 +4120,11 @@
             <a:r>
               <a:rPr sz="1000" b="1">
                 <a:solidFill>
-                  <a:srgbClr val="1B7A43"/>
-                </a:solidFill>
-                <a:latin typeface="Helvetica Neue"/>
-              </a:rPr>
-              <a:t>#2  ·  FB  ·  2,491 views</a:t>
+                  <a:srgbClr val="141833"/>
+                </a:solidFill>
+                <a:latin typeface="Helvetica Neue"/>
+              </a:rPr>
+              <a:t>#2  ·  TT  ·  2,205 views</a:t>
             </a:r>
           </a:p>
         </p:txBody>
@@ -4158,7 +4158,7 @@
                 </a:solidFill>
                 <a:latin typeface="Helvetica Neue"/>
               </a:rPr>
-              <a:t>A terrifying moment outside City Hall as a car nearly hits a family. A witness captured th</a:t>
+              <a:t>Responding to your yapping, Downey! Big things are happening. This is...</a:t>
             </a:r>
           </a:p>
         </p:txBody>
@@ -4222,7 +4222,7 @@
             <a:avLst/>
           </a:prstGeom>
           <a:solidFill>
-            <a:srgbClr val="1B7A43"/>
+            <a:srgbClr val="141833"/>
           </a:solidFill>
           <a:ln>
             <a:noFill/>
@@ -4276,11 +4276,11 @@
             <a:r>
               <a:rPr sz="1000" b="1">
                 <a:solidFill>
-                  <a:srgbClr val="1B7A43"/>
-                </a:solidFill>
-                <a:latin typeface="Helvetica Neue"/>
-              </a:rPr>
-              <a:t>#3  ·  FB  ·  795 views</a:t>
+                  <a:srgbClr val="141833"/>
+                </a:solidFill>
+                <a:latin typeface="Helvetica Neue"/>
+              </a:rPr>
+              <a:t>#3  ·  FB  ·  1,641 views</a:t>
             </a:r>
           </a:p>
         </p:txBody>
@@ -4314,7 +4314,7 @@
                 </a:solidFill>
                 <a:latin typeface="Helvetica Neue"/>
               </a:rPr>
-              <a:t>Running a restaurant means the show must go on, even when things are falling apart. Unlike</a:t>
+              <a:t>Discover Pop's Wings, a family-owned gem in Downey serving up more than just wings. Their </a:t>
             </a:r>
           </a:p>
         </p:txBody>
@@ -4388,7 +4388,7 @@
             <a:r>
               <a:rPr sz="1000" b="1">
                 <a:solidFill>
-                  <a:srgbClr val="1B7A43"/>
+                  <a:srgbClr val="141833"/>
                 </a:solidFill>
                 <a:latin typeface="Helvetica Neue"/>
               </a:rPr>
@@ -4426,7 +4426,7 @@
                 </a:solidFill>
                 <a:latin typeface="Helvetica Neue"/>
               </a:rPr>
-              <a:t>Solid mid-tier. Worth continued investment. Test scaling to see if it holds.</a:t>
+              <a:t>Modest reach. Fine as filler between heavy hitters, not a headline lane.</a:t>
             </a:r>
           </a:p>
         </p:txBody>
@@ -4556,7 +4556,7 @@
                 </a:solidFill>
                 <a:latin typeface="Georgia"/>
               </a:rPr>
-              <a:t>American Pride</a:t>
+              <a:t>Resident Highlights</a:t>
             </a:r>
           </a:p>
         </p:txBody>
@@ -4590,7 +4590,7 @@
                 </a:solidFill>
                 <a:latin typeface="Helvetica Neue"/>
               </a:rPr>
-              <a:t>Patriotic content — July 4th, veterans, pride pieces.</a:t>
+              <a:t>Non-political citizen profiles — small business owners, community members. Granata, Gately, the deacon.</a:t>
             </a:r>
           </a:p>
         </p:txBody>
@@ -4654,7 +4654,7 @@
             <a:avLst/>
           </a:prstGeom>
           <a:solidFill>
-            <a:srgbClr val="990011"/>
+            <a:srgbClr val="1B7A43"/>
           </a:solidFill>
           <a:ln>
             <a:noFill/>
@@ -4708,7 +4708,7 @@
             <a:r>
               <a:rPr sz="1100" b="1">
                 <a:solidFill>
-                  <a:srgbClr val="990011"/>
+                  <a:srgbClr val="1B7A43"/>
                 </a:solidFill>
                 <a:latin typeface="Helvetica Neue"/>
               </a:rPr>
@@ -4746,7 +4746,7 @@
                 </a:solidFill>
                 <a:latin typeface="Georgia"/>
               </a:rPr>
-              <a:t>4,239</a:t>
+              <a:t>7,314</a:t>
             </a:r>
           </a:p>
         </p:txBody>
@@ -4780,7 +4780,7 @@
                 </a:solidFill>
                 <a:latin typeface="Helvetica Neue"/>
               </a:rPr>
-              <a:t>7 posts · 155 likes</a:t>
+              <a:t>6 posts · 134 likes</a:t>
             </a:r>
           </a:p>
         </p:txBody>
@@ -4814,7 +4814,7 @@
                 </a:solidFill>
                 <a:latin typeface="Helvetica Neue"/>
               </a:rPr>
-              <a:t>606 average views per post</a:t>
+              <a:t>1,219 average views per post</a:t>
             </a:r>
           </a:p>
         </p:txBody>
@@ -4844,7 +4844,7 @@
             <a:r>
               <a:rPr sz="1100" b="1">
                 <a:solidFill>
-                  <a:srgbClr val="990011"/>
+                  <a:srgbClr val="1B7A43"/>
                 </a:solidFill>
                 <a:latin typeface="Helvetica Neue"/>
               </a:rPr>
@@ -4912,7 +4912,7 @@
             <a:avLst/>
           </a:prstGeom>
           <a:solidFill>
-            <a:srgbClr val="990011"/>
+            <a:srgbClr val="1B7A43"/>
           </a:solidFill>
           <a:ln>
             <a:noFill/>
@@ -4966,11 +4966,11 @@
             <a:r>
               <a:rPr sz="1000" b="1">
                 <a:solidFill>
-                  <a:srgbClr val="990011"/>
-                </a:solidFill>
-                <a:latin typeface="Helvetica Neue"/>
-              </a:rPr>
-              <a:t>#1  ·  TT  ·  1,098 views</a:t>
+                  <a:srgbClr val="1B7A43"/>
+                </a:solidFill>
+                <a:latin typeface="Helvetica Neue"/>
+              </a:rPr>
+              <a:t>#1  ·  IG  ·  3,551 views</a:t>
             </a:r>
           </a:p>
         </p:txBody>
@@ -5004,7 +5004,7 @@
                 </a:solidFill>
                 <a:latin typeface="Helvetica Neue"/>
               </a:rPr>
-              <a:t>Embarrassed to be American? Pride in this country is essential, espec...</a:t>
+              <a:t>Almost ran over a family. I got the license plate, checked on them. Turns out he's a Catho</a:t>
             </a:r>
           </a:p>
         </p:txBody>
@@ -5068,7 +5068,7 @@
             <a:avLst/>
           </a:prstGeom>
           <a:solidFill>
-            <a:srgbClr val="990011"/>
+            <a:srgbClr val="1B7A43"/>
           </a:solidFill>
           <a:ln>
             <a:noFill/>
@@ -5122,11 +5122,11 @@
             <a:r>
               <a:rPr sz="1000" b="1">
                 <a:solidFill>
-                  <a:srgbClr val="990011"/>
-                </a:solidFill>
-                <a:latin typeface="Helvetica Neue"/>
-              </a:rPr>
-              <a:t>#2  ·  TT  ·  870 views</a:t>
+                  <a:srgbClr val="1B7A43"/>
+                </a:solidFill>
+                <a:latin typeface="Helvetica Neue"/>
+              </a:rPr>
+              <a:t>#2  ·  FB  ·  2,491 views</a:t>
             </a:r>
           </a:p>
         </p:txBody>
@@ -5160,7 +5160,7 @@
                 </a:solidFill>
                 <a:latin typeface="Helvetica Neue"/>
               </a:rPr>
-              <a:t>13 years in the Army and they paid for college. Psychology degree achieved! You can enlist</a:t>
+              <a:t>A terrifying moment outside City Hall as a car nearly hits a family. A witness captured th</a:t>
             </a:r>
           </a:p>
         </p:txBody>
@@ -5224,7 +5224,7 @@
             <a:avLst/>
           </a:prstGeom>
           <a:solidFill>
-            <a:srgbClr val="990011"/>
+            <a:srgbClr val="1B7A43"/>
           </a:solidFill>
           <a:ln>
             <a:noFill/>
@@ -5278,11 +5278,11 @@
             <a:r>
               <a:rPr sz="1000" b="1">
                 <a:solidFill>
-                  <a:srgbClr val="990011"/>
-                </a:solidFill>
-                <a:latin typeface="Helvetica Neue"/>
-              </a:rPr>
-              <a:t>#3  ·  FB  ·  797 views</a:t>
+                  <a:srgbClr val="1B7A43"/>
+                </a:solidFill>
+                <a:latin typeface="Helvetica Neue"/>
+              </a:rPr>
+              <a:t>#3  ·  FB  ·  799 views</a:t>
             </a:r>
           </a:p>
         </p:txBody>
@@ -5316,7 +5316,7 @@
                 </a:solidFill>
                 <a:latin typeface="Helvetica Neue"/>
               </a:rPr>
-              <a:t>The World Cup is a massive moneymaker for FIFA, projected to generate $11 billion in profi</a:t>
+              <a:t>Running a restaurant means the show must go on, even when things are falling apart. Unlike</a:t>
             </a:r>
           </a:p>
         </p:txBody>
@@ -5390,7 +5390,7 @@
             <a:r>
               <a:rPr sz="1000" b="1">
                 <a:solidFill>
-                  <a:srgbClr val="990011"/>
+                  <a:srgbClr val="1B7A43"/>
                 </a:solidFill>
                 <a:latin typeface="Helvetica Neue"/>
               </a:rPr>
@@ -5428,7 +5428,7 @@
                 </a:solidFill>
                 <a:latin typeface="Helvetica Neue"/>
               </a:rPr>
-              <a:t>Modest reach. Fine as filler between heavy hitters, not a headline lane.</a:t>
+              <a:t>Solid mid-tier. Worth continued investment. Test scaling to see if it holds.</a:t>
             </a:r>
           </a:p>
         </p:txBody>
@@ -6750,7 +6750,7 @@
                 </a:solidFill>
                 <a:latin typeface="Georgia"/>
               </a:rPr>
-              <a:t>1,100</a:t>
+              <a:t>1,105</a:t>
             </a:r>
           </a:p>
         </p:txBody>
@@ -6818,7 +6818,7 @@
                 </a:solidFill>
                 <a:latin typeface="Helvetica Neue"/>
               </a:rPr>
-              <a:t>550 average views per post</a:t>
+              <a:t>552 average views per post</a:t>
             </a:r>
           </a:p>
         </p:txBody>
@@ -6974,7 +6974,7 @@
                 </a:solidFill>
                 <a:latin typeface="Helvetica Neue"/>
               </a:rPr>
-              <a:t>#1  ·  FB  ·  698 views</a:t>
+              <a:t>#1  ·  FB  ·  699 views</a:t>
             </a:r>
           </a:p>
         </p:txBody>
@@ -7130,7 +7130,7 @@
                 </a:solidFill>
                 <a:latin typeface="Helvetica Neue"/>
               </a:rPr>
-              <a:t>#2  ·  TT  ·  402 views</a:t>
+              <a:t>#2  ·  TT  ·  406 views</a:t>
             </a:r>
           </a:p>
         </p:txBody>
@@ -8500,7 +8500,7 @@
                 </a:solidFill>
                 <a:latin typeface="Helvetica Neue"/>
               </a:rPr>
-              <a:t>2,578 avg views/post   ·   27 posts   ·   69,601 total</a:t>
+              <a:t>2,578 avg views/post   ·   27 posts   ·   69,605 total</a:t>
             </a:r>
           </a:p>
         </p:txBody>
@@ -8792,7 +8792,7 @@
                 </a:solidFill>
                 <a:latin typeface="Helvetica Neue"/>
               </a:rPr>
-              <a:t>1,276 avg views/post   ·   96 posts   ·   122,536 total</a:t>
+              <a:t>1,514 avg views/post   ·   101 posts   ·   152,900 total</a:t>
             </a:r>
           </a:p>
         </p:txBody>
@@ -10711,7 +10711,7 @@
                 </a:solidFill>
                 <a:latin typeface="Helvetica Neue"/>
               </a:rPr>
-              <a:t>69,601 views · 27 posts</a:t>
+              <a:t>69,605 views · 27 posts</a:t>
             </a:r>
           </a:p>
         </p:txBody>
@@ -10759,7 +10759,7 @@
         <p:spPr>
           <a:xfrm>
             <a:off x="4114800" y="2548682"/>
-            <a:ext cx="5456057" cy="143810"/>
+            <a:ext cx="5532032" cy="143810"/>
           </a:xfrm>
           <a:prstGeom prst="rect">
             <a:avLst/>
@@ -10802,7 +10802,7 @@
         </p:nvSpPr>
         <p:spPr>
           <a:xfrm>
-            <a:off x="9662297" y="2466386"/>
+            <a:off x="9738272" y="2466386"/>
             <a:ext cx="2286000" cy="344978"/>
           </a:xfrm>
           <a:prstGeom prst="rect">
@@ -10823,7 +10823,7 @@
                 </a:solidFill>
                 <a:latin typeface="Helvetica Neue"/>
               </a:rPr>
-              <a:t>61,073 views · 21 posts</a:t>
+              <a:t>61,927 views · 23 posts</a:t>
             </a:r>
           </a:p>
         </p:txBody>
@@ -10871,7 +10871,7 @@
         <p:spPr>
           <a:xfrm>
             <a:off x="4114800" y="2893660"/>
-            <a:ext cx="4067854" cy="143810"/>
+            <a:ext cx="4068871" cy="143810"/>
           </a:xfrm>
           <a:prstGeom prst="rect">
             <a:avLst/>
@@ -10914,7 +10914,7 @@
         </p:nvSpPr>
         <p:spPr>
           <a:xfrm>
-            <a:off x="8274094" y="2811364"/>
+            <a:off x="8275111" y="2811364"/>
             <a:ext cx="2286000" cy="344978"/>
           </a:xfrm>
           <a:prstGeom prst="rect">
@@ -10935,7 +10935,7 @@
                 </a:solidFill>
                 <a:latin typeface="Helvetica Neue"/>
               </a:rPr>
-              <a:t>45,534 views · 13 posts</a:t>
+              <a:t>45,548 views · 13 posts</a:t>
             </a:r>
           </a:p>
         </p:txBody>
@@ -10969,7 +10969,7 @@
                 </a:solidFill>
                 <a:latin typeface="Helvetica Neue"/>
               </a:rPr>
-              <a:t>Food &amp; Local Flavor</a:t>
+              <a:t>Other / Uncategorized</a:t>
             </a:r>
           </a:p>
         </p:txBody>
@@ -10983,7 +10983,119 @@
         <p:spPr>
           <a:xfrm>
             <a:off x="4114800" y="3238638"/>
-            <a:ext cx="3246672" cy="143810"/>
+            <a:ext cx="3494470" cy="143810"/>
+          </a:xfrm>
+          <a:prstGeom prst="rect">
+            <a:avLst/>
+          </a:prstGeom>
+          <a:solidFill>
+            <a:srgbClr val="6B7082"/>
+          </a:solidFill>
+          <a:ln>
+            <a:noFill/>
+          </a:ln>
+          <a:effectLst/>
+        </p:spPr>
+        <p:style>
+          <a:lnRef idx="1">
+            <a:schemeClr val="accent1"/>
+          </a:lnRef>
+          <a:fillRef idx="3">
+            <a:schemeClr val="accent1"/>
+          </a:fillRef>
+          <a:effectRef idx="2">
+            <a:schemeClr val="accent1"/>
+          </a:effectRef>
+          <a:fontRef idx="minor">
+            <a:schemeClr val="lt1"/>
+          </a:fontRef>
+        </p:style>
+        <p:txBody>
+          <a:bodyPr rtlCol="0" anchor="ctr"/>
+          <a:lstStyle/>
+          <a:p>
+            <a:pPr algn="ctr"/>
+          </a:p>
+        </p:txBody>
+      </p:sp>
+      <p:sp>
+        <p:nvSpPr>
+          <p:cNvPr id="17" name="TextBox 16"/>
+          <p:cNvSpPr txBox="1"/>
+          <p:nvPr/>
+        </p:nvSpPr>
+        <p:spPr>
+          <a:xfrm>
+            <a:off x="7700710" y="3156342"/>
+            <a:ext cx="2286000" cy="344978"/>
+          </a:xfrm>
+          <a:prstGeom prst="rect">
+            <a:avLst/>
+          </a:prstGeom>
+          <a:noFill/>
+        </p:spPr>
+        <p:txBody>
+          <a:bodyPr wrap="square" lIns="0" rIns="0" tIns="0" bIns="0">
+            <a:spAutoFit/>
+          </a:bodyPr>
+          <a:lstStyle/>
+          <a:p>
+            <a:r>
+              <a:rPr sz="900" b="0">
+                <a:solidFill>
+                  <a:srgbClr val="6B7082"/>
+                </a:solidFill>
+                <a:latin typeface="Helvetica Neue"/>
+              </a:rPr>
+              <a:t>39,118 views · 69 posts</a:t>
+            </a:r>
+          </a:p>
+        </p:txBody>
+      </p:sp>
+      <p:sp>
+        <p:nvSpPr>
+          <p:cNvPr id="18" name="TextBox 17"/>
+          <p:cNvSpPr txBox="1"/>
+          <p:nvPr/>
+        </p:nvSpPr>
+        <p:spPr>
+          <a:xfrm>
+            <a:off x="731520" y="3501320"/>
+            <a:ext cx="3200400" cy="344978"/>
+          </a:xfrm>
+          <a:prstGeom prst="rect">
+            <a:avLst/>
+          </a:prstGeom>
+          <a:noFill/>
+        </p:spPr>
+        <p:txBody>
+          <a:bodyPr wrap="square" lIns="0" rIns="0" tIns="0" bIns="0">
+            <a:spAutoFit/>
+          </a:bodyPr>
+          <a:lstStyle/>
+          <a:p>
+            <a:r>
+              <a:rPr sz="1100" b="1">
+                <a:solidFill>
+                  <a:srgbClr val="141833"/>
+                </a:solidFill>
+                <a:latin typeface="Helvetica Neue"/>
+              </a:rPr>
+              <a:t>Food &amp; Local Flavor</a:t>
+            </a:r>
+          </a:p>
+        </p:txBody>
+      </p:sp>
+      <p:sp>
+        <p:nvSpPr>
+          <p:cNvPr id="19" name="Rectangle 18"/>
+          <p:cNvSpPr/>
+          <p:nvPr/>
+        </p:nvSpPr>
+        <p:spPr>
+          <a:xfrm>
+            <a:off x="4114800" y="3583616"/>
+            <a:ext cx="3370567" cy="143810"/>
           </a:xfrm>
           <a:prstGeom prst="rect">
             <a:avLst/>
@@ -11020,13 +11132,13 @@
       </p:sp>
       <p:sp>
         <p:nvSpPr>
-          <p:cNvPr id="17" name="TextBox 16"/>
-          <p:cNvSpPr txBox="1"/>
-          <p:nvPr/>
-        </p:nvSpPr>
-        <p:spPr>
-          <a:xfrm>
-            <a:off x="7452912" y="3156342"/>
+          <p:cNvPr id="20" name="TextBox 19"/>
+          <p:cNvSpPr txBox="1"/>
+          <p:nvPr/>
+        </p:nvSpPr>
+        <p:spPr>
+          <a:xfrm>
+            <a:off x="7576807" y="3501320"/>
             <a:ext cx="2286000" cy="344978"/>
           </a:xfrm>
           <a:prstGeom prst="rect">
@@ -11047,20 +11159,20 @@
                 </a:solidFill>
                 <a:latin typeface="Helvetica Neue"/>
               </a:rPr>
-              <a:t>36,342 views · 27 posts</a:t>
-            </a:r>
-          </a:p>
-        </p:txBody>
-      </p:sp>
-      <p:sp>
-        <p:nvSpPr>
-          <p:cNvPr id="18" name="TextBox 17"/>
-          <p:cNvSpPr txBox="1"/>
-          <p:nvPr/>
-        </p:nvSpPr>
-        <p:spPr>
-          <a:xfrm>
-            <a:off x="731520" y="3501320"/>
+              <a:t>37,731 views · 30 posts</a:t>
+            </a:r>
+          </a:p>
+        </p:txBody>
+      </p:sp>
+      <p:sp>
+        <p:nvSpPr>
+          <p:cNvPr id="21" name="TextBox 20"/>
+          <p:cNvSpPr txBox="1"/>
+          <p:nvPr/>
+        </p:nvSpPr>
+        <p:spPr>
+          <a:xfrm>
+            <a:off x="731520" y="3846298"/>
             <a:ext cx="3200400" cy="344978"/>
           </a:xfrm>
           <a:prstGeom prst="rect">
@@ -11081,27 +11193,27 @@
                 </a:solidFill>
                 <a:latin typeface="Helvetica Neue"/>
               </a:rPr>
-              <a:t>Other / Uncategorized</a:t>
-            </a:r>
-          </a:p>
-        </p:txBody>
-      </p:sp>
-      <p:sp>
-        <p:nvSpPr>
-          <p:cNvPr id="19" name="Rectangle 18"/>
+              <a:t>American Pride</a:t>
+            </a:r>
+          </a:p>
+        </p:txBody>
+      </p:sp>
+      <p:sp>
+        <p:nvSpPr>
+          <p:cNvPr id="22" name="Rectangle 21"/>
           <p:cNvSpPr/>
           <p:nvPr/>
         </p:nvSpPr>
         <p:spPr>
           <a:xfrm>
-            <a:off x="4114800" y="3583616"/>
-            <a:ext cx="3210759" cy="143810"/>
+            <a:off x="4114800" y="3928594"/>
+            <a:ext cx="2886390" cy="143810"/>
           </a:xfrm>
           <a:prstGeom prst="rect">
             <a:avLst/>
           </a:prstGeom>
           <a:solidFill>
-            <a:srgbClr val="6B7082"/>
+            <a:srgbClr val="990011"/>
           </a:solidFill>
           <a:ln>
             <a:noFill/>
@@ -11132,13 +11244,13 @@
       </p:sp>
       <p:sp>
         <p:nvSpPr>
-          <p:cNvPr id="20" name="TextBox 19"/>
-          <p:cNvSpPr txBox="1"/>
-          <p:nvPr/>
-        </p:nvSpPr>
-        <p:spPr>
-          <a:xfrm>
-            <a:off x="7416999" y="3501320"/>
+          <p:cNvPr id="23" name="TextBox 22"/>
+          <p:cNvSpPr txBox="1"/>
+          <p:nvPr/>
+        </p:nvSpPr>
+        <p:spPr>
+          <a:xfrm>
+            <a:off x="7092630" y="3846298"/>
             <a:ext cx="2286000" cy="344978"/>
           </a:xfrm>
           <a:prstGeom prst="rect">
@@ -11159,20 +11271,20 @@
                 </a:solidFill>
                 <a:latin typeface="Helvetica Neue"/>
               </a:rPr>
-              <a:t>35,940 views · 65 posts</a:t>
-            </a:r>
-          </a:p>
-        </p:txBody>
-      </p:sp>
-      <p:sp>
-        <p:nvSpPr>
-          <p:cNvPr id="21" name="TextBox 20"/>
-          <p:cNvSpPr txBox="1"/>
-          <p:nvPr/>
-        </p:nvSpPr>
-        <p:spPr>
-          <a:xfrm>
-            <a:off x="731520" y="3846298"/>
+              <a:t>32,311 views · 8 posts</a:t>
+            </a:r>
+          </a:p>
+        </p:txBody>
+      </p:sp>
+      <p:sp>
+        <p:nvSpPr>
+          <p:cNvPr id="24" name="TextBox 23"/>
+          <p:cNvSpPr txBox="1"/>
+          <p:nvPr/>
+        </p:nvSpPr>
+        <p:spPr>
+          <a:xfrm>
+            <a:off x="731520" y="4191277"/>
             <a:ext cx="3200400" cy="344978"/>
           </a:xfrm>
           <a:prstGeom prst="rect">
@@ -11200,14 +11312,14 @@
       </p:sp>
       <p:sp>
         <p:nvSpPr>
-          <p:cNvPr id="22" name="Rectangle 21"/>
+          <p:cNvPr id="25" name="Rectangle 24"/>
           <p:cNvSpPr/>
           <p:nvPr/>
         </p:nvSpPr>
         <p:spPr>
           <a:xfrm>
-            <a:off x="4114800" y="3928594"/>
-            <a:ext cx="2307744" cy="143810"/>
+            <a:off x="4114800" y="4273573"/>
+            <a:ext cx="2358530" cy="143810"/>
           </a:xfrm>
           <a:prstGeom prst="rect">
             <a:avLst/>
@@ -11244,13 +11356,13 @@
       </p:sp>
       <p:sp>
         <p:nvSpPr>
-          <p:cNvPr id="23" name="TextBox 22"/>
-          <p:cNvSpPr txBox="1"/>
-          <p:nvPr/>
-        </p:nvSpPr>
-        <p:spPr>
-          <a:xfrm>
-            <a:off x="6513984" y="3846298"/>
+          <p:cNvPr id="26" name="TextBox 25"/>
+          <p:cNvSpPr txBox="1"/>
+          <p:nvPr/>
+        </p:nvSpPr>
+        <p:spPr>
+          <a:xfrm>
+            <a:off x="6564770" y="4191277"/>
             <a:ext cx="2286000" cy="344978"/>
           </a:xfrm>
           <a:prstGeom prst="rect">
@@ -11271,20 +11383,20 @@
                 </a:solidFill>
                 <a:latin typeface="Helvetica Neue"/>
               </a:rPr>
-              <a:t>25,832 views · 35 posts</a:t>
-            </a:r>
-          </a:p>
-        </p:txBody>
-      </p:sp>
-      <p:sp>
-        <p:nvSpPr>
-          <p:cNvPr id="24" name="TextBox 23"/>
-          <p:cNvSpPr txBox="1"/>
-          <p:nvPr/>
-        </p:nvSpPr>
-        <p:spPr>
-          <a:xfrm>
-            <a:off x="731520" y="4191277"/>
+              <a:t>26,402 views · 36 posts</a:t>
+            </a:r>
+          </a:p>
+        </p:txBody>
+      </p:sp>
+      <p:sp>
+        <p:nvSpPr>
+          <p:cNvPr id="27" name="TextBox 26"/>
+          <p:cNvSpPr txBox="1"/>
+          <p:nvPr/>
+        </p:nvSpPr>
+        <p:spPr>
+          <a:xfrm>
+            <a:off x="731520" y="4536255"/>
             <a:ext cx="3200400" cy="344978"/>
           </a:xfrm>
           <a:prstGeom prst="rect">
@@ -11312,14 +11424,14 @@
       </p:sp>
       <p:sp>
         <p:nvSpPr>
-          <p:cNvPr id="25" name="Rectangle 24"/>
+          <p:cNvPr id="28" name="Rectangle 27"/>
           <p:cNvSpPr/>
           <p:nvPr/>
         </p:nvSpPr>
         <p:spPr>
           <a:xfrm>
-            <a:off x="4114800" y="4273573"/>
-            <a:ext cx="2240116" cy="143810"/>
+            <a:off x="4114800" y="4618551"/>
+            <a:ext cx="2318331" cy="143810"/>
           </a:xfrm>
           <a:prstGeom prst="rect">
             <a:avLst/>
@@ -11356,13 +11468,13 @@
       </p:sp>
       <p:sp>
         <p:nvSpPr>
-          <p:cNvPr id="26" name="TextBox 25"/>
-          <p:cNvSpPr txBox="1"/>
-          <p:nvPr/>
-        </p:nvSpPr>
-        <p:spPr>
-          <a:xfrm>
-            <a:off x="6446356" y="4191277"/>
+          <p:cNvPr id="29" name="TextBox 28"/>
+          <p:cNvSpPr txBox="1"/>
+          <p:nvPr/>
+        </p:nvSpPr>
+        <p:spPr>
+          <a:xfrm>
+            <a:off x="6524571" y="4536255"/>
             <a:ext cx="2286000" cy="344978"/>
           </a:xfrm>
           <a:prstGeom prst="rect">
@@ -11383,20 +11495,20 @@
                 </a:solidFill>
                 <a:latin typeface="Helvetica Neue"/>
               </a:rPr>
-              <a:t>25,075 views · 36 posts</a:t>
-            </a:r>
-          </a:p>
-        </p:txBody>
-      </p:sp>
-      <p:sp>
-        <p:nvSpPr>
-          <p:cNvPr id="27" name="TextBox 26"/>
-          <p:cNvSpPr txBox="1"/>
-          <p:nvPr/>
-        </p:nvSpPr>
-        <p:spPr>
-          <a:xfrm>
-            <a:off x="731520" y="4536255"/>
+              <a:t>25,952 views · 37 posts</a:t>
+            </a:r>
+          </a:p>
+        </p:txBody>
+      </p:sp>
+      <p:sp>
+        <p:nvSpPr>
+          <p:cNvPr id="30" name="TextBox 29"/>
+          <p:cNvSpPr txBox="1"/>
+          <p:nvPr/>
+        </p:nvSpPr>
+        <p:spPr>
+          <a:xfrm>
+            <a:off x="731520" y="4881233"/>
             <a:ext cx="3200400" cy="344978"/>
           </a:xfrm>
           <a:prstGeom prst="rect">
@@ -11424,14 +11536,14 @@
       </p:sp>
       <p:sp>
         <p:nvSpPr>
-          <p:cNvPr id="28" name="Rectangle 27"/>
+          <p:cNvPr id="31" name="Rectangle 30"/>
           <p:cNvSpPr/>
           <p:nvPr/>
         </p:nvSpPr>
         <p:spPr>
           <a:xfrm>
-            <a:off x="4114800" y="4618551"/>
-            <a:ext cx="652336" cy="143810"/>
+            <a:off x="4114800" y="4963529"/>
+            <a:ext cx="653370" cy="143810"/>
           </a:xfrm>
           <a:prstGeom prst="rect">
             <a:avLst/>
@@ -11468,13 +11580,13 @@
       </p:sp>
       <p:sp>
         <p:nvSpPr>
-          <p:cNvPr id="29" name="TextBox 28"/>
-          <p:cNvSpPr txBox="1"/>
-          <p:nvPr/>
-        </p:nvSpPr>
-        <p:spPr>
-          <a:xfrm>
-            <a:off x="4858576" y="4536255"/>
+          <p:cNvPr id="32" name="TextBox 31"/>
+          <p:cNvSpPr txBox="1"/>
+          <p:nvPr/>
+        </p:nvSpPr>
+        <p:spPr>
+          <a:xfrm>
+            <a:off x="4859610" y="4881233"/>
             <a:ext cx="2286000" cy="344978"/>
           </a:xfrm>
           <a:prstGeom prst="rect">
@@ -11495,119 +11607,7 @@
                 </a:solidFill>
                 <a:latin typeface="Helvetica Neue"/>
               </a:rPr>
-              <a:t>7,302 views · 6 posts</a:t>
-            </a:r>
-          </a:p>
-        </p:txBody>
-      </p:sp>
-      <p:sp>
-        <p:nvSpPr>
-          <p:cNvPr id="30" name="TextBox 29"/>
-          <p:cNvSpPr txBox="1"/>
-          <p:nvPr/>
-        </p:nvSpPr>
-        <p:spPr>
-          <a:xfrm>
-            <a:off x="731520" y="4881233"/>
-            <a:ext cx="3200400" cy="344978"/>
-          </a:xfrm>
-          <a:prstGeom prst="rect">
-            <a:avLst/>
-          </a:prstGeom>
-          <a:noFill/>
-        </p:spPr>
-        <p:txBody>
-          <a:bodyPr wrap="square" lIns="0" rIns="0" tIns="0" bIns="0">
-            <a:spAutoFit/>
-          </a:bodyPr>
-          <a:lstStyle/>
-          <a:p>
-            <a:r>
-              <a:rPr sz="1100" b="1">
-                <a:solidFill>
-                  <a:srgbClr val="141833"/>
-                </a:solidFill>
-                <a:latin typeface="Helvetica Neue"/>
-              </a:rPr>
-              <a:t>American Pride</a:t>
-            </a:r>
-          </a:p>
-        </p:txBody>
-      </p:sp>
-      <p:sp>
-        <p:nvSpPr>
-          <p:cNvPr id="31" name="Rectangle 30"/>
-          <p:cNvSpPr/>
-          <p:nvPr/>
-        </p:nvSpPr>
-        <p:spPr>
-          <a:xfrm>
-            <a:off x="4114800" y="4963529"/>
-            <a:ext cx="378698" cy="143810"/>
-          </a:xfrm>
-          <a:prstGeom prst="rect">
-            <a:avLst/>
-          </a:prstGeom>
-          <a:solidFill>
-            <a:srgbClr val="990011"/>
-          </a:solidFill>
-          <a:ln>
-            <a:noFill/>
-          </a:ln>
-          <a:effectLst/>
-        </p:spPr>
-        <p:style>
-          <a:lnRef idx="1">
-            <a:schemeClr val="accent1"/>
-          </a:lnRef>
-          <a:fillRef idx="3">
-            <a:schemeClr val="accent1"/>
-          </a:fillRef>
-          <a:effectRef idx="2">
-            <a:schemeClr val="accent1"/>
-          </a:effectRef>
-          <a:fontRef idx="minor">
-            <a:schemeClr val="lt1"/>
-          </a:fontRef>
-        </p:style>
-        <p:txBody>
-          <a:bodyPr rtlCol="0" anchor="ctr"/>
-          <a:lstStyle/>
-          <a:p>
-            <a:pPr algn="ctr"/>
-          </a:p>
-        </p:txBody>
-      </p:sp>
-      <p:sp>
-        <p:nvSpPr>
-          <p:cNvPr id="32" name="TextBox 31"/>
-          <p:cNvSpPr txBox="1"/>
-          <p:nvPr/>
-        </p:nvSpPr>
-        <p:spPr>
-          <a:xfrm>
-            <a:off x="4584938" y="4881233"/>
-            <a:ext cx="2286000" cy="344978"/>
-          </a:xfrm>
-          <a:prstGeom prst="rect">
-            <a:avLst/>
-          </a:prstGeom>
-          <a:noFill/>
-        </p:spPr>
-        <p:txBody>
-          <a:bodyPr wrap="square" lIns="0" rIns="0" tIns="0" bIns="0">
-            <a:spAutoFit/>
-          </a:bodyPr>
-          <a:lstStyle/>
-          <a:p>
-            <a:r>
-              <a:rPr sz="900" b="0">
-                <a:solidFill>
-                  <a:srgbClr val="6B7082"/>
-                </a:solidFill>
-                <a:latin typeface="Helvetica Neue"/>
-              </a:rPr>
-              <a:t>4,239 views · 7 posts</a:t>
+              <a:t>7,314 views · 6 posts</a:t>
             </a:r>
           </a:p>
         </p:txBody>
@@ -11655,7 +11655,7 @@
         <p:spPr>
           <a:xfrm>
             <a:off x="4114800" y="5308507"/>
-            <a:ext cx="361277" cy="143810"/>
+            <a:ext cx="361256" cy="143810"/>
           </a:xfrm>
           <a:prstGeom prst="rect">
             <a:avLst/>
@@ -11698,7 +11698,7 @@
         </p:nvSpPr>
         <p:spPr>
           <a:xfrm>
-            <a:off x="4567517" y="5226211"/>
+            <a:off x="4567496" y="5226211"/>
             <a:ext cx="2286000" cy="344978"/>
           </a:xfrm>
           <a:prstGeom prst="rect">
@@ -11767,7 +11767,7 @@
         <p:spPr>
           <a:xfrm>
             <a:off x="4114800" y="5653485"/>
-            <a:ext cx="98270" cy="143810"/>
+            <a:ext cx="98711" cy="143810"/>
           </a:xfrm>
           <a:prstGeom prst="rect">
             <a:avLst/>
@@ -11810,7 +11810,7 @@
         </p:nvSpPr>
         <p:spPr>
           <a:xfrm>
-            <a:off x="4304510" y="5571189"/>
+            <a:off x="4304951" y="5571189"/>
             <a:ext cx="2286000" cy="344978"/>
           </a:xfrm>
           <a:prstGeom prst="rect">
@@ -11831,7 +11831,7 @@
                 </a:solidFill>
                 <a:latin typeface="Helvetica Neue"/>
               </a:rPr>
-              <a:t>1,100 views · 2 posts</a:t>
+              <a:t>1,105 views · 2 posts</a:t>
             </a:r>
           </a:p>
         </p:txBody>
@@ -12185,7 +12185,7 @@
                 </a:solidFill>
                 <a:latin typeface="Georgia"/>
               </a:rPr>
-              <a:t>69,601</a:t>
+              <a:t>69,605</a:t>
             </a:r>
           </a:p>
         </p:txBody>
@@ -13187,7 +13187,7 @@
                 </a:solidFill>
                 <a:latin typeface="Georgia"/>
               </a:rPr>
-              <a:t>61,073</a:t>
+              <a:t>61,927</a:t>
             </a:r>
           </a:p>
         </p:txBody>
@@ -13221,7 +13221,7 @@
                 </a:solidFill>
                 <a:latin typeface="Helvetica Neue"/>
               </a:rPr>
-              <a:t>21 posts · 1,444 likes</a:t>
+              <a:t>23 posts · 1,460 likes</a:t>
             </a:r>
           </a:p>
         </p:txBody>
@@ -13255,7 +13255,7 @@
                 </a:solidFill>
                 <a:latin typeface="Helvetica Neue"/>
               </a:rPr>
-              <a:t>2,908 average views per post</a:t>
+              <a:t>2,692 average views per post</a:t>
             </a:r>
           </a:p>
         </p:txBody>
@@ -13411,7 +13411,7 @@
                 </a:solidFill>
                 <a:latin typeface="Helvetica Neue"/>
               </a:rPr>
-              <a:t>#1  ·  TT  ·  27,300 views</a:t>
+              <a:t>#1  ·  TT  ·  27,400 views</a:t>
             </a:r>
           </a:p>
         </p:txBody>
@@ -14189,7 +14189,7 @@
                 </a:solidFill>
                 <a:latin typeface="Georgia"/>
               </a:rPr>
-              <a:t>45,534</a:t>
+              <a:t>45,548</a:t>
             </a:r>
           </a:p>
         </p:txBody>
@@ -14257,7 +14257,7 @@
                 </a:solidFill>
                 <a:latin typeface="Helvetica Neue"/>
               </a:rPr>
-              <a:t>3,503 average views per post</a:t>
+              <a:t>3,504 average views per post</a:t>
             </a:r>
           </a:p>
         </p:txBody>
@@ -15001,7 +15001,7 @@
                 </a:solidFill>
                 <a:latin typeface="Georgia"/>
               </a:rPr>
-              <a:t>Food &amp; Local Flavor</a:t>
+              <a:t>Other / Uncategorized</a:t>
             </a:r>
           </a:p>
         </p:txBody>
@@ -15035,7 +15035,7 @@
                 </a:solidFill>
                 <a:latin typeface="Helvetica Neue"/>
               </a:rPr>
-              <a:t>Restaurants, chefs, dining — the everyday Downey.</a:t>
+              <a:t>Content that doesn't fit the above buckets — usually casual/BTS.</a:t>
             </a:r>
           </a:p>
         </p:txBody>
@@ -15099,7 +15099,7 @@
             <a:avLst/>
           </a:prstGeom>
           <a:solidFill>
-            <a:srgbClr val="1B7A43"/>
+            <a:srgbClr val="6B7082"/>
           </a:solidFill>
           <a:ln>
             <a:noFill/>
@@ -15153,7 +15153,7 @@
             <a:r>
               <a:rPr sz="1100" b="1">
                 <a:solidFill>
-                  <a:srgbClr val="1B7A43"/>
+                  <a:srgbClr val="6B7082"/>
                 </a:solidFill>
                 <a:latin typeface="Helvetica Neue"/>
               </a:rPr>
@@ -15191,7 +15191,7 @@
                 </a:solidFill>
                 <a:latin typeface="Georgia"/>
               </a:rPr>
-              <a:t>36,342</a:t>
+              <a:t>39,118</a:t>
             </a:r>
           </a:p>
         </p:txBody>
@@ -15225,7 +15225,7 @@
                 </a:solidFill>
                 <a:latin typeface="Helvetica Neue"/>
               </a:rPr>
-              <a:t>27 posts · 1,391 likes</a:t>
+              <a:t>69 posts · 1,567 likes</a:t>
             </a:r>
           </a:p>
         </p:txBody>
@@ -15259,7 +15259,7 @@
                 </a:solidFill>
                 <a:latin typeface="Helvetica Neue"/>
               </a:rPr>
-              <a:t>1,346 average views per post</a:t>
+              <a:t>567 average views per post</a:t>
             </a:r>
           </a:p>
         </p:txBody>
@@ -15289,7 +15289,7 @@
             <a:r>
               <a:rPr sz="1100" b="1">
                 <a:solidFill>
-                  <a:srgbClr val="1B7A43"/>
+                  <a:srgbClr val="6B7082"/>
                 </a:solidFill>
                 <a:latin typeface="Helvetica Neue"/>
               </a:rPr>
@@ -15357,7 +15357,7 @@
             <a:avLst/>
           </a:prstGeom>
           <a:solidFill>
-            <a:srgbClr val="1B7A43"/>
+            <a:srgbClr val="6B7082"/>
           </a:solidFill>
           <a:ln>
             <a:noFill/>
@@ -15411,11 +15411,11 @@
             <a:r>
               <a:rPr sz="1000" b="1">
                 <a:solidFill>
-                  <a:srgbClr val="1B7A43"/>
-                </a:solidFill>
-                <a:latin typeface="Helvetica Neue"/>
-              </a:rPr>
-              <a:t>#1  ·  TT  ·  13,600 views</a:t>
+                  <a:srgbClr val="6B7082"/>
+                </a:solidFill>
+                <a:latin typeface="Helvetica Neue"/>
+              </a:rPr>
+              <a:t>#1  ·  TT  ·  7,360 views</a:t>
             </a:r>
           </a:p>
         </p:txBody>
@@ -15449,7 +15449,7 @@
                 </a:solidFill>
                 <a:latin typeface="Helvetica Neue"/>
               </a:rPr>
-              <a:t>Mama Lu's is coming to Downey! Asian community favorite, famous for their tenderloin. Get </a:t>
+              <a:t>Pop's Wings just opened and it's a must-try! Their pastrami sandwich with sweet potato fri</a:t>
             </a:r>
           </a:p>
         </p:txBody>
@@ -15513,7 +15513,7 @@
             <a:avLst/>
           </a:prstGeom>
           <a:solidFill>
-            <a:srgbClr val="1B7A43"/>
+            <a:srgbClr val="6B7082"/>
           </a:solidFill>
           <a:ln>
             <a:noFill/>
@@ -15567,11 +15567,11 @@
             <a:r>
               <a:rPr sz="1000" b="1">
                 <a:solidFill>
-                  <a:srgbClr val="1B7A43"/>
-                </a:solidFill>
-                <a:latin typeface="Helvetica Neue"/>
-              </a:rPr>
-              <a:t>#2  ·  TT  ·  3,346 views</a:t>
+                  <a:srgbClr val="6B7082"/>
+                </a:solidFill>
+                <a:latin typeface="Helvetica Neue"/>
+              </a:rPr>
+              <a:t>#2  ·  IG  ·  3,717 views</a:t>
             </a:r>
           </a:p>
         </p:txBody>
@@ -15605,7 +15605,7 @@
                 </a:solidFill>
                 <a:latin typeface="Helvetica Neue"/>
               </a:rPr>
-              <a:t>Downey's food scene is wild! Porto's, pho, Mongolian BBQ, Waba Grill, poke, and Starfish S</a:t>
+              <a:t>Don't believe the fake rumors. Married 42 years, no strippers, no cocaine at my bachelor p</a:t>
             </a:r>
           </a:p>
         </p:txBody>
@@ -15669,7 +15669,7 @@
             <a:avLst/>
           </a:prstGeom>
           <a:solidFill>
-            <a:srgbClr val="1B7A43"/>
+            <a:srgbClr val="6B7082"/>
           </a:solidFill>
           <a:ln>
             <a:noFill/>
@@ -15723,11 +15723,11 @@
             <a:r>
               <a:rPr sz="1000" b="1">
                 <a:solidFill>
-                  <a:srgbClr val="1B7A43"/>
-                </a:solidFill>
-                <a:latin typeface="Helvetica Neue"/>
-              </a:rPr>
-              <a:t>#3  ·  IG  ·  2,326 views</a:t>
+                  <a:srgbClr val="6B7082"/>
+                </a:solidFill>
+                <a:latin typeface="Helvetica Neue"/>
+              </a:rPr>
+              <a:t>#3  ·  IG  ·  1,626 views</a:t>
             </a:r>
           </a:p>
         </p:txBody>
@@ -15761,7 +15761,7 @@
                 </a:solidFill>
                 <a:latin typeface="Helvetica Neue"/>
               </a:rPr>
-              <a:t>So many food choices right next to Porto's downtown Downey! From pho and Mongolian BBQ to </a:t>
+              <a:t>Truth revealed: Accusations of attacking opponents, fueling division, and demeaning women </a:t>
             </a:r>
           </a:p>
         </p:txBody>
@@ -15835,7 +15835,7 @@
             <a:r>
               <a:rPr sz="1000" b="1">
                 <a:solidFill>
-                  <a:srgbClr val="1B7A43"/>
+                  <a:srgbClr val="6B7082"/>
                 </a:solidFill>
                 <a:latin typeface="Helvetica Neue"/>
               </a:rPr>
@@ -15873,7 +15873,7 @@
                 </a:solidFill>
                 <a:latin typeface="Helvetica Neue"/>
               </a:rPr>
-              <a:t>Solid mid-tier. Worth continued investment. Test scaling to see if it holds.</a:t>
+              <a:t>Modest reach. Fine as filler between heavy hitters, not a headline lane.</a:t>
             </a:r>
           </a:p>
         </p:txBody>
@@ -16003,7 +16003,7 @@
                 </a:solidFill>
                 <a:latin typeface="Georgia"/>
               </a:rPr>
-              <a:t>Other / Uncategorized</a:t>
+              <a:t>Food &amp; Local Flavor</a:t>
             </a:r>
           </a:p>
         </p:txBody>
@@ -16037,7 +16037,7 @@
                 </a:solidFill>
                 <a:latin typeface="Helvetica Neue"/>
               </a:rPr>
-              <a:t>Content that doesn't fit the above buckets — usually casual/BTS.</a:t>
+              <a:t>Restaurants, chefs, dining — the everyday Downey.</a:t>
             </a:r>
           </a:p>
         </p:txBody>
@@ -16101,7 +16101,7 @@
             <a:avLst/>
           </a:prstGeom>
           <a:solidFill>
-            <a:srgbClr val="6B7082"/>
+            <a:srgbClr val="1B7A43"/>
           </a:solidFill>
           <a:ln>
             <a:noFill/>
@@ -16155,7 +16155,7 @@
             <a:r>
               <a:rPr sz="1100" b="1">
                 <a:solidFill>
-                  <a:srgbClr val="6B7082"/>
+                  <a:srgbClr val="1B7A43"/>
                 </a:solidFill>
                 <a:latin typeface="Helvetica Neue"/>
               </a:rPr>
@@ -16193,7 +16193,7 @@
                 </a:solidFill>
                 <a:latin typeface="Georgia"/>
               </a:rPr>
-              <a:t>35,940</a:t>
+              <a:t>37,731</a:t>
             </a:r>
           </a:p>
         </p:txBody>
@@ -16227,7 +16227,7 @@
                 </a:solidFill>
                 <a:latin typeface="Helvetica Neue"/>
               </a:rPr>
-              <a:t>65 posts · 1,425 likes</a:t>
+              <a:t>30 posts · 1,451 likes</a:t>
             </a:r>
           </a:p>
         </p:txBody>
@@ -16261,7 +16261,7 @@
                 </a:solidFill>
                 <a:latin typeface="Helvetica Neue"/>
               </a:rPr>
-              <a:t>553 average views per post</a:t>
+              <a:t>1,258 average views per post</a:t>
             </a:r>
           </a:p>
         </p:txBody>
@@ -16291,7 +16291,7 @@
             <a:r>
               <a:rPr sz="1100" b="1">
                 <a:solidFill>
-                  <a:srgbClr val="6B7082"/>
+                  <a:srgbClr val="1B7A43"/>
                 </a:solidFill>
                 <a:latin typeface="Helvetica Neue"/>
               </a:rPr>
@@ -16359,7 +16359,7 @@
             <a:avLst/>
           </a:prstGeom>
           <a:solidFill>
-            <a:srgbClr val="6B7082"/>
+            <a:srgbClr val="1B7A43"/>
           </a:solidFill>
           <a:ln>
             <a:noFill/>
@@ -16413,11 +16413,11 @@
             <a:r>
               <a:rPr sz="1000" b="1">
                 <a:solidFill>
-                  <a:srgbClr val="6B7082"/>
-                </a:solidFill>
-                <a:latin typeface="Helvetica Neue"/>
-              </a:rPr>
-              <a:t>#1  ·  TT  ·  5,704 views</a:t>
+                  <a:srgbClr val="1B7A43"/>
+                </a:solidFill>
+                <a:latin typeface="Helvetica Neue"/>
+              </a:rPr>
+              <a:t>#1  ·  TT  ·  13,600 views</a:t>
             </a:r>
           </a:p>
         </p:txBody>
@@ -16451,7 +16451,7 @@
                 </a:solidFill>
                 <a:latin typeface="Helvetica Neue"/>
               </a:rPr>
-              <a:t>Pop's Wings just opened and it's a must-try! Their pastrami sandwich with sweet potato fri</a:t>
+              <a:t>Mama Lu's is coming to Downey! Asian community favorite, famous for their tenderloin. Get </a:t>
             </a:r>
           </a:p>
         </p:txBody>
@@ -16515,7 +16515,7 @@
             <a:avLst/>
           </a:prstGeom>
           <a:solidFill>
-            <a:srgbClr val="6B7082"/>
+            <a:srgbClr val="1B7A43"/>
           </a:solidFill>
           <a:ln>
             <a:noFill/>
@@ -16569,11 +16569,11 @@
             <a:r>
               <a:rPr sz="1000" b="1">
                 <a:solidFill>
-                  <a:srgbClr val="6B7082"/>
-                </a:solidFill>
-                <a:latin typeface="Helvetica Neue"/>
-              </a:rPr>
-              <a:t>#2  ·  IG  ·  3,717 views</a:t>
+                  <a:srgbClr val="1B7A43"/>
+                </a:solidFill>
+                <a:latin typeface="Helvetica Neue"/>
+              </a:rPr>
+              <a:t>#2  ·  TT  ·  3,346 views</a:t>
             </a:r>
           </a:p>
         </p:txBody>
@@ -16607,7 +16607,7 @@
                 </a:solidFill>
                 <a:latin typeface="Helvetica Neue"/>
               </a:rPr>
-              <a:t>Don't believe the fake rumors. Married 42 years, no strippers, no cocaine at my bachelor p</a:t>
+              <a:t>Downey's food scene is wild! Porto's, pho, Mongolian BBQ, Waba Grill, poke, and Starfish S</a:t>
             </a:r>
           </a:p>
         </p:txBody>
@@ -16671,7 +16671,7 @@
             <a:avLst/>
           </a:prstGeom>
           <a:solidFill>
-            <a:srgbClr val="6B7082"/>
+            <a:srgbClr val="1B7A43"/>
           </a:solidFill>
           <a:ln>
             <a:noFill/>
@@ -16725,11 +16725,11 @@
             <a:r>
               <a:rPr sz="1000" b="1">
                 <a:solidFill>
-                  <a:srgbClr val="6B7082"/>
-                </a:solidFill>
-                <a:latin typeface="Helvetica Neue"/>
-              </a:rPr>
-              <a:t>#3  ·  IG  ·  1,626 views</a:t>
+                  <a:srgbClr val="1B7A43"/>
+                </a:solidFill>
+                <a:latin typeface="Helvetica Neue"/>
+              </a:rPr>
+              <a:t>#3  ·  IG  ·  2,326 views</a:t>
             </a:r>
           </a:p>
         </p:txBody>
@@ -16763,7 +16763,7 @@
                 </a:solidFill>
                 <a:latin typeface="Helvetica Neue"/>
               </a:rPr>
-              <a:t>Truth revealed: Accusations of attacking opponents, fueling division, and demeaning women </a:t>
+              <a:t>So many food choices right next to Porto's downtown Downey! From pho and Mongolian BBQ to </a:t>
             </a:r>
           </a:p>
         </p:txBody>
@@ -16837,7 +16837,7 @@
             <a:r>
               <a:rPr sz="1000" b="1">
                 <a:solidFill>
-                  <a:srgbClr val="6B7082"/>
+                  <a:srgbClr val="1B7A43"/>
                 </a:solidFill>
                 <a:latin typeface="Helvetica Neue"/>
               </a:rPr>
@@ -16875,7 +16875,7 @@
                 </a:solidFill>
                 <a:latin typeface="Helvetica Neue"/>
               </a:rPr>
-              <a:t>Modest reach. Fine as filler between heavy hitters, not a headline lane.</a:t>
+              <a:t>Solid mid-tier. Worth continued investment. Test scaling to see if it holds.</a:t>
             </a:r>
           </a:p>
         </p:txBody>
@@ -17005,7 +17005,7 @@
                 </a:solidFill>
                 <a:latin typeface="Georgia"/>
               </a:rPr>
-              <a:t>Elections &amp; Judicial</a:t>
+              <a:t>American Pride</a:t>
             </a:r>
           </a:p>
         </p:txBody>
@@ -17039,7 +17039,7 @@
                 </a:solidFill>
                 <a:latin typeface="Helvetica Neue"/>
               </a:rPr>
-              <a:t>Coverage of campaigns, courts, and local government.</a:t>
+              <a:t>Patriotic content — July 4th, veterans, pride pieces.</a:t>
             </a:r>
           </a:p>
         </p:txBody>
@@ -17103,7 +17103,7 @@
             <a:avLst/>
           </a:prstGeom>
           <a:solidFill>
-            <a:srgbClr val="2F3C7E"/>
+            <a:srgbClr val="990011"/>
           </a:solidFill>
           <a:ln>
             <a:noFill/>
@@ -17157,7 +17157,7 @@
             <a:r>
               <a:rPr sz="1100" b="1">
                 <a:solidFill>
-                  <a:srgbClr val="2F3C7E"/>
+                  <a:srgbClr val="990011"/>
                 </a:solidFill>
                 <a:latin typeface="Helvetica Neue"/>
               </a:rPr>
@@ -17195,7 +17195,7 @@
                 </a:solidFill>
                 <a:latin typeface="Georgia"/>
               </a:rPr>
-              <a:t>25,832</a:t>
+              <a:t>32,311</a:t>
             </a:r>
           </a:p>
         </p:txBody>
@@ -17229,7 +17229,7 @@
                 </a:solidFill>
                 <a:latin typeface="Helvetica Neue"/>
               </a:rPr>
-              <a:t>35 posts · 489 likes</a:t>
+              <a:t>8 posts · 1,857 likes</a:t>
             </a:r>
           </a:p>
         </p:txBody>
@@ -17263,7 +17263,7 @@
                 </a:solidFill>
                 <a:latin typeface="Helvetica Neue"/>
               </a:rPr>
-              <a:t>738 average views per post</a:t>
+              <a:t>4,039 average views per post</a:t>
             </a:r>
           </a:p>
         </p:txBody>
@@ -17293,7 +17293,7 @@
             <a:r>
               <a:rPr sz="1100" b="1">
                 <a:solidFill>
-                  <a:srgbClr val="2F3C7E"/>
+                  <a:srgbClr val="990011"/>
                 </a:solidFill>
                 <a:latin typeface="Helvetica Neue"/>
               </a:rPr>
@@ -17361,7 +17361,7 @@
             <a:avLst/>
           </a:prstGeom>
           <a:solidFill>
-            <a:srgbClr val="2F3C7E"/>
+            <a:srgbClr val="990011"/>
           </a:solidFill>
           <a:ln>
             <a:noFill/>
@@ -17415,11 +17415,11 @@
             <a:r>
               <a:rPr sz="1000" b="1">
                 <a:solidFill>
-                  <a:srgbClr val="2F3C7E"/>
-                </a:solidFill>
-                <a:latin typeface="Helvetica Neue"/>
-              </a:rPr>
-              <a:t>#1  ·  FB  ·  5,812 views</a:t>
+                  <a:srgbClr val="990011"/>
+                </a:solidFill>
+                <a:latin typeface="Helvetica Neue"/>
+              </a:rPr>
+              <a:t>#1  ·  TT  ·  28,000 views</a:t>
             </a:r>
           </a:p>
         </p:txBody>
@@ -17453,7 +17453,7 @@
                 </a:solidFill>
                 <a:latin typeface="Helvetica Neue"/>
               </a:rPr>
-              <a:t>Tensions flared at the city council meeting as a woman repeatedly defied the mayor's reque</a:t>
+              <a:t>Combat jobs aren't for everyone. See how your MOS determines deployment likelihood and wha</a:t>
             </a:r>
           </a:p>
         </p:txBody>
@@ -17517,7 +17517,7 @@
             <a:avLst/>
           </a:prstGeom>
           <a:solidFill>
-            <a:srgbClr val="2F3C7E"/>
+            <a:srgbClr val="990011"/>
           </a:solidFill>
           <a:ln>
             <a:noFill/>
@@ -17571,11 +17571,11 @@
             <a:r>
               <a:rPr sz="1000" b="1">
                 <a:solidFill>
-                  <a:srgbClr val="2F3C7E"/>
-                </a:solidFill>
-                <a:latin typeface="Helvetica Neue"/>
-              </a:rPr>
-              <a:t>#2  ·  IG  ·  3,200 views</a:t>
+                  <a:srgbClr val="990011"/>
+                </a:solidFill>
+                <a:latin typeface="Helvetica Neue"/>
+              </a:rPr>
+              <a:t>#2  ·  TT  ·  1,098 views</a:t>
             </a:r>
           </a:p>
         </p:txBody>
@@ -17609,7 +17609,7 @@
                 </a:solidFill>
                 <a:latin typeface="Helvetica Neue"/>
               </a:rPr>
-              <a:t>Lifelong Democrat, moderate. Focused on helping Downey, not politics. Endorsed by both par</a:t>
+              <a:t>Embarrassed to be American? Pride in this country is essential, espec...</a:t>
             </a:r>
           </a:p>
         </p:txBody>
@@ -17673,7 +17673,7 @@
             <a:avLst/>
           </a:prstGeom>
           <a:solidFill>
-            <a:srgbClr val="2F3C7E"/>
+            <a:srgbClr val="990011"/>
           </a:solidFill>
           <a:ln>
             <a:noFill/>
@@ -17727,11 +17727,11 @@
             <a:r>
               <a:rPr sz="1000" b="1">
                 <a:solidFill>
-                  <a:srgbClr val="2F3C7E"/>
-                </a:solidFill>
-                <a:latin typeface="Helvetica Neue"/>
-              </a:rPr>
-              <a:t>#3  ·  IG  ·  1,999 views</a:t>
+                  <a:srgbClr val="990011"/>
+                </a:solidFill>
+                <a:latin typeface="Helvetica Neue"/>
+              </a:rPr>
+              <a:t>#3  ·  TT  ·  942 views</a:t>
             </a:r>
           </a:p>
         </p:txBody>
@@ -17765,7 +17765,7 @@
                 </a:solidFill>
                 <a:latin typeface="Helvetica Neue"/>
               </a:rPr>
-              <a:t>A council member fined $13,000 for unreported campaign contributions. It's public record. </a:t>
+              <a:t>13 years in the Army and they paid for college. Psychology degree achieved! You can enlist</a:t>
             </a:r>
           </a:p>
         </p:txBody>
@@ -17839,7 +17839,7 @@
             <a:r>
               <a:rPr sz="1000" b="1">
                 <a:solidFill>
-                  <a:srgbClr val="2F3C7E"/>
+                  <a:srgbClr val="990011"/>
                 </a:solidFill>
                 <a:latin typeface="Helvetica Neue"/>
               </a:rPr>
@@ -17877,7 +17877,7 @@
                 </a:solidFill>
                 <a:latin typeface="Helvetica Neue"/>
               </a:rPr>
-              <a:t>Modest reach. Fine as filler between heavy hitters, not a headline lane.</a:t>
+              <a:t>Strong performer. Keep investing — American Pride is a proven driver of reach.</a:t>
             </a:r>
           </a:p>
         </p:txBody>
@@ -18007,7 +18007,7 @@
                 </a:solidFill>
                 <a:latin typeface="Georgia"/>
               </a:rPr>
-              <a:t>Community &amp; Culture</a:t>
+              <a:t>Elections &amp; Judicial</a:t>
             </a:r>
           </a:p>
         </p:txBody>
@@ -18041,7 +18041,7 @@
                 </a:solidFill>
                 <a:latin typeface="Helvetica Neue"/>
               </a:rPr>
-              <a:t>Local color, events, city life.</a:t>
+              <a:t>Coverage of campaigns, courts, and local government.</a:t>
             </a:r>
           </a:p>
         </p:txBody>
@@ -18105,7 +18105,7 @@
             <a:avLst/>
           </a:prstGeom>
           <a:solidFill>
-            <a:srgbClr val="141833"/>
+            <a:srgbClr val="2F3C7E"/>
           </a:solidFill>
           <a:ln>
             <a:noFill/>
@@ -18159,7 +18159,7 @@
             <a:r>
               <a:rPr sz="1100" b="1">
                 <a:solidFill>
-                  <a:srgbClr val="141833"/>
+                  <a:srgbClr val="2F3C7E"/>
                 </a:solidFill>
                 <a:latin typeface="Helvetica Neue"/>
               </a:rPr>
@@ -18197,7 +18197,7 @@
                 </a:solidFill>
                 <a:latin typeface="Georgia"/>
               </a:rPr>
-              <a:t>25,075</a:t>
+              <a:t>26,402</a:t>
             </a:r>
           </a:p>
         </p:txBody>
@@ -18231,7 +18231,7 @@
                 </a:solidFill>
                 <a:latin typeface="Helvetica Neue"/>
               </a:rPr>
-              <a:t>36 posts · 667 likes</a:t>
+              <a:t>36 posts · 507 likes</a:t>
             </a:r>
           </a:p>
         </p:txBody>
@@ -18265,7 +18265,7 @@
                 </a:solidFill>
                 <a:latin typeface="Helvetica Neue"/>
               </a:rPr>
-              <a:t>697 average views per post</a:t>
+              <a:t>733 average views per post</a:t>
             </a:r>
           </a:p>
         </p:txBody>
@@ -18295,7 +18295,7 @@
             <a:r>
               <a:rPr sz="1100" b="1">
                 <a:solidFill>
-                  <a:srgbClr val="141833"/>
+                  <a:srgbClr val="2F3C7E"/>
                 </a:solidFill>
                 <a:latin typeface="Helvetica Neue"/>
               </a:rPr>
@@ -18363,7 +18363,7 @@
             <a:avLst/>
           </a:prstGeom>
           <a:solidFill>
-            <a:srgbClr val="141833"/>
+            <a:srgbClr val="2F3C7E"/>
           </a:solidFill>
           <a:ln>
             <a:noFill/>
@@ -18417,11 +18417,11 @@
             <a:r>
               <a:rPr sz="1000" b="1">
                 <a:solidFill>
-                  <a:srgbClr val="141833"/>
-                </a:solidFill>
-                <a:latin typeface="Helvetica Neue"/>
-              </a:rPr>
-              <a:t>#1  ·  IG  ·  2,848 views</a:t>
+                  <a:srgbClr val="2F3C7E"/>
+                </a:solidFill>
+                <a:latin typeface="Helvetica Neue"/>
+              </a:rPr>
+              <a:t>#1  ·  FB  ·  5,812 views</a:t>
             </a:r>
           </a:p>
         </p:txBody>
@@ -18455,7 +18455,7 @@
                 </a:solidFill>
                 <a:latin typeface="Helvetica Neue"/>
               </a:rPr>
-              <a:t>Responded to your yapping, Downey! This one's to answer the last two shows. Wouldn't have </a:t>
+              <a:t>Tensions flared at the city council meeting as a woman repeatedly defied the mayor's reque</a:t>
             </a:r>
           </a:p>
         </p:txBody>
@@ -18519,7 +18519,7 @@
             <a:avLst/>
           </a:prstGeom>
           <a:solidFill>
-            <a:srgbClr val="141833"/>
+            <a:srgbClr val="2F3C7E"/>
           </a:solidFill>
           <a:ln>
             <a:noFill/>
@@ -18573,11 +18573,11 @@
             <a:r>
               <a:rPr sz="1000" b="1">
                 <a:solidFill>
-                  <a:srgbClr val="141833"/>
-                </a:solidFill>
-                <a:latin typeface="Helvetica Neue"/>
-              </a:rPr>
-              <a:t>#2  ·  TT  ·  2,205 views</a:t>
+                  <a:srgbClr val="2F3C7E"/>
+                </a:solidFill>
+                <a:latin typeface="Helvetica Neue"/>
+              </a:rPr>
+              <a:t>#2  ·  IG  ·  3,200 views</a:t>
             </a:r>
           </a:p>
         </p:txBody>
@@ -18611,7 +18611,7 @@
                 </a:solidFill>
                 <a:latin typeface="Helvetica Neue"/>
               </a:rPr>
-              <a:t>Responding to your yapping, Downey! Big things are happening. This is...</a:t>
+              <a:t>Lifelong Democrat, moderate. Focused on helping Downey, not politics. Endorsed by both par</a:t>
             </a:r>
           </a:p>
         </p:txBody>
@@ -18675,7 +18675,7 @@
             <a:avLst/>
           </a:prstGeom>
           <a:solidFill>
-            <a:srgbClr val="141833"/>
+            <a:srgbClr val="2F3C7E"/>
           </a:solidFill>
           <a:ln>
             <a:noFill/>
@@ -18729,11 +18729,11 @@
             <a:r>
               <a:rPr sz="1000" b="1">
                 <a:solidFill>
-                  <a:srgbClr val="141833"/>
-                </a:solidFill>
-                <a:latin typeface="Helvetica Neue"/>
-              </a:rPr>
-              <a:t>#3  ·  IG  ·  1,637 views</a:t>
+                  <a:srgbClr val="2F3C7E"/>
+                </a:solidFill>
+                <a:latin typeface="Helvetica Neue"/>
+              </a:rPr>
+              <a:t>#3  ·  IG  ·  1,999 views</a:t>
             </a:r>
           </a:p>
         </p:txBody>
@@ -18767,7 +18767,7 @@
                 </a:solidFill>
                 <a:latin typeface="Helvetica Neue"/>
               </a:rPr>
-              <a:t>City seal jacket for a bike ride? So what? This decision is all about owning it. Embracing</a:t>
+              <a:t>A council member fined $13,000 for unreported campaign contributions. It's public record. </a:t>
             </a:r>
           </a:p>
         </p:txBody>
@@ -18841,7 +18841,7 @@
             <a:r>
               <a:rPr sz="1000" b="1">
                 <a:solidFill>
-                  <a:srgbClr val="141833"/>
+                  <a:srgbClr val="2F3C7E"/>
                 </a:solidFill>
                 <a:latin typeface="Helvetica Neue"/>
               </a:rPr>
